--- a/Figures_EP/Arcs/Architecture_Bigger.pptx
+++ b/Figures_EP/Arcs/Architecture_Bigger.pptx
@@ -197,7 +197,7 @@
           <a:p>
             <a:fld id="{4F2B3EEC-C8B4-0543-943F-91B3791C5E43}" type="datetimeFigureOut">
               <a:rPr lang="en-US" smtClean="0"/>
-              <a:t>3/15/24</a:t>
+              <a:t>5/13/24</a:t>
             </a:fld>
             <a:endParaRPr lang="en-US"/>
           </a:p>
@@ -734,7 +734,7 @@
           <a:p>
             <a:fld id="{697CBF4A-2AD2-1249-BC5E-D6BCA9656194}" type="datetimeFigureOut">
               <a:rPr lang="en-US" smtClean="0"/>
-              <a:t>3/15/24</a:t>
+              <a:t>5/13/24</a:t>
             </a:fld>
             <a:endParaRPr lang="en-US"/>
           </a:p>
@@ -932,7 +932,7 @@
           <a:p>
             <a:fld id="{697CBF4A-2AD2-1249-BC5E-D6BCA9656194}" type="datetimeFigureOut">
               <a:rPr lang="en-US" smtClean="0"/>
-              <a:t>3/15/24</a:t>
+              <a:t>5/13/24</a:t>
             </a:fld>
             <a:endParaRPr lang="en-US"/>
           </a:p>
@@ -1140,7 +1140,7 @@
           <a:p>
             <a:fld id="{697CBF4A-2AD2-1249-BC5E-D6BCA9656194}" type="datetimeFigureOut">
               <a:rPr lang="en-US" smtClean="0"/>
-              <a:t>3/15/24</a:t>
+              <a:t>5/13/24</a:t>
             </a:fld>
             <a:endParaRPr lang="en-US"/>
           </a:p>
@@ -1338,7 +1338,7 @@
           <a:p>
             <a:fld id="{697CBF4A-2AD2-1249-BC5E-D6BCA9656194}" type="datetimeFigureOut">
               <a:rPr lang="en-US" smtClean="0"/>
-              <a:t>3/15/24</a:t>
+              <a:t>5/13/24</a:t>
             </a:fld>
             <a:endParaRPr lang="en-US"/>
           </a:p>
@@ -1613,7 +1613,7 @@
           <a:p>
             <a:fld id="{697CBF4A-2AD2-1249-BC5E-D6BCA9656194}" type="datetimeFigureOut">
               <a:rPr lang="en-US" smtClean="0"/>
-              <a:t>3/15/24</a:t>
+              <a:t>5/13/24</a:t>
             </a:fld>
             <a:endParaRPr lang="en-US"/>
           </a:p>
@@ -1878,7 +1878,7 @@
           <a:p>
             <a:fld id="{697CBF4A-2AD2-1249-BC5E-D6BCA9656194}" type="datetimeFigureOut">
               <a:rPr lang="en-US" smtClean="0"/>
-              <a:t>3/15/24</a:t>
+              <a:t>5/13/24</a:t>
             </a:fld>
             <a:endParaRPr lang="en-US"/>
           </a:p>
@@ -2290,7 +2290,7 @@
           <a:p>
             <a:fld id="{697CBF4A-2AD2-1249-BC5E-D6BCA9656194}" type="datetimeFigureOut">
               <a:rPr lang="en-US" smtClean="0"/>
-              <a:t>3/15/24</a:t>
+              <a:t>5/13/24</a:t>
             </a:fld>
             <a:endParaRPr lang="en-US"/>
           </a:p>
@@ -2431,7 +2431,7 @@
           <a:p>
             <a:fld id="{697CBF4A-2AD2-1249-BC5E-D6BCA9656194}" type="datetimeFigureOut">
               <a:rPr lang="en-US" smtClean="0"/>
-              <a:t>3/15/24</a:t>
+              <a:t>5/13/24</a:t>
             </a:fld>
             <a:endParaRPr lang="en-US"/>
           </a:p>
@@ -2544,7 +2544,7 @@
           <a:p>
             <a:fld id="{697CBF4A-2AD2-1249-BC5E-D6BCA9656194}" type="datetimeFigureOut">
               <a:rPr lang="en-US" smtClean="0"/>
-              <a:t>3/15/24</a:t>
+              <a:t>5/13/24</a:t>
             </a:fld>
             <a:endParaRPr lang="en-US"/>
           </a:p>
@@ -2855,7 +2855,7 @@
           <a:p>
             <a:fld id="{697CBF4A-2AD2-1249-BC5E-D6BCA9656194}" type="datetimeFigureOut">
               <a:rPr lang="en-US" smtClean="0"/>
-              <a:t>3/15/24</a:t>
+              <a:t>5/13/24</a:t>
             </a:fld>
             <a:endParaRPr lang="en-US"/>
           </a:p>
@@ -3143,7 +3143,7 @@
           <a:p>
             <a:fld id="{697CBF4A-2AD2-1249-BC5E-D6BCA9656194}" type="datetimeFigureOut">
               <a:rPr lang="en-US" smtClean="0"/>
-              <a:t>3/15/24</a:t>
+              <a:t>5/13/24</a:t>
             </a:fld>
             <a:endParaRPr lang="en-US"/>
           </a:p>
@@ -3384,7 +3384,7 @@
           <a:p>
             <a:fld id="{697CBF4A-2AD2-1249-BC5E-D6BCA9656194}" type="datetimeFigureOut">
               <a:rPr lang="en-US" smtClean="0"/>
-              <a:t>3/15/24</a:t>
+              <a:t>5/13/24</a:t>
             </a:fld>
             <a:endParaRPr lang="en-US"/>
           </a:p>
@@ -3815,7 +3815,7 @@
         </p:nvSpPr>
         <p:spPr>
           <a:xfrm flipH="1">
-            <a:off x="5724894" y="1670569"/>
+            <a:off x="5671104" y="1670569"/>
             <a:ext cx="468226" cy="513921"/>
           </a:xfrm>
           <a:prstGeom prst="flowChartPunchedCard">
@@ -3873,8 +3873,8 @@
         </p:nvSpPr>
         <p:spPr>
           <a:xfrm>
-            <a:off x="1546012" y="894905"/>
-            <a:ext cx="3806778" cy="4408940"/>
+            <a:off x="1546012" y="1357490"/>
+            <a:ext cx="3806778" cy="4271412"/>
           </a:xfrm>
           <a:prstGeom prst="roundRect">
             <a:avLst>
@@ -3928,8 +3928,8 @@
         </p:nvSpPr>
         <p:spPr>
           <a:xfrm>
-            <a:off x="7401706" y="5982910"/>
-            <a:ext cx="848887" cy="578027"/>
+            <a:off x="6434239" y="5186835"/>
+            <a:ext cx="1383753" cy="251337"/>
           </a:xfrm>
           <a:prstGeom prst="roundRect">
             <a:avLst/>
@@ -3985,8 +3985,8 @@
         </p:nvCxnSpPr>
         <p:spPr>
           <a:xfrm flipV="1">
-            <a:off x="8250593" y="6268864"/>
-            <a:ext cx="516779" cy="3060"/>
+            <a:off x="7817992" y="5310526"/>
+            <a:ext cx="228621" cy="1978"/>
           </a:xfrm>
           <a:prstGeom prst="straightConnector1">
             <a:avLst/>
@@ -4031,8 +4031,8 @@
         </p:nvSpPr>
         <p:spPr>
           <a:xfrm>
-            <a:off x="8767372" y="5922861"/>
-            <a:ext cx="859253" cy="692005"/>
+            <a:off x="8046613" y="5184129"/>
+            <a:ext cx="1383753" cy="252793"/>
           </a:xfrm>
           <a:prstGeom prst="rect">
             <a:avLst/>
@@ -4067,9 +4067,6 @@
               </a:rPr>
               <a:t>Final Output: </a:t>
             </a:r>
-          </a:p>
-          <a:p>
-            <a:pPr algn="ctr"/>
             <a:r>
               <a:rPr lang="en-US" sz="1400" i="1" dirty="0">
                 <a:latin typeface="Times New Roman" panose="02020603050405020304" pitchFamily="18" charset="0"/>
@@ -4999,7 +4996,7 @@
         </p:nvSpPr>
         <p:spPr>
           <a:xfrm>
-            <a:off x="1585795" y="1783080"/>
+            <a:off x="1585795" y="2245665"/>
             <a:ext cx="274320" cy="292608"/>
           </a:xfrm>
           <a:prstGeom prst="can">
@@ -5059,7 +5056,7 @@
         </p:nvSpPr>
         <p:spPr>
           <a:xfrm>
-            <a:off x="1586019" y="2834640"/>
+            <a:off x="1586019" y="3297225"/>
             <a:ext cx="274320" cy="292608"/>
           </a:xfrm>
           <a:prstGeom prst="can">
@@ -5117,7 +5114,7 @@
         </p:nvSpPr>
         <p:spPr>
           <a:xfrm>
-            <a:off x="1623316" y="3478731"/>
+            <a:off x="1623316" y="3941316"/>
             <a:ext cx="80683" cy="81281"/>
           </a:xfrm>
           <a:prstGeom prst="ellipse">
@@ -5173,7 +5170,7 @@
         </p:nvSpPr>
         <p:spPr>
           <a:xfrm>
-            <a:off x="1623316" y="3625287"/>
+            <a:off x="1623316" y="4087872"/>
             <a:ext cx="80683" cy="83489"/>
           </a:xfrm>
           <a:prstGeom prst="ellipse">
@@ -5229,7 +5226,7 @@
         </p:nvSpPr>
         <p:spPr>
           <a:xfrm flipH="1">
-            <a:off x="2024859" y="2073692"/>
+            <a:off x="2024859" y="2536277"/>
             <a:ext cx="997235" cy="283781"/>
           </a:xfrm>
           <a:prstGeom prst="flowChartPunchedCard">
@@ -5292,7 +5289,7 @@
         </p:nvSpPr>
         <p:spPr>
           <a:xfrm flipH="1">
-            <a:off x="2032628" y="2457930"/>
+            <a:off x="2032628" y="2920515"/>
             <a:ext cx="1003262" cy="386824"/>
           </a:xfrm>
           <a:prstGeom prst="flowChartPunchedCard">
@@ -5352,7 +5349,7 @@
         </p:nvSpPr>
         <p:spPr>
           <a:xfrm flipH="1">
-            <a:off x="2024821" y="3315619"/>
+            <a:off x="2024821" y="3778204"/>
             <a:ext cx="996498" cy="300300"/>
           </a:xfrm>
           <a:prstGeom prst="flowChartPunchedCard">
@@ -5419,7 +5416,7 @@
         </p:nvCxnSpPr>
         <p:spPr>
           <a:xfrm flipV="1">
-            <a:off x="1860339" y="2651342"/>
+            <a:off x="1860339" y="3113927"/>
             <a:ext cx="172289" cy="329602"/>
           </a:xfrm>
           <a:prstGeom prst="bentConnector3">
@@ -5470,7 +5467,7 @@
         </p:nvCxnSpPr>
         <p:spPr>
           <a:xfrm>
-            <a:off x="1860339" y="2980944"/>
+            <a:off x="1860339" y="3443529"/>
             <a:ext cx="164482" cy="484825"/>
           </a:xfrm>
           <a:prstGeom prst="bentConnector3">
@@ -5521,7 +5518,7 @@
         </p:nvCxnSpPr>
         <p:spPr>
           <a:xfrm flipV="1">
-            <a:off x="1860115" y="1407187"/>
+            <a:off x="1860115" y="1869772"/>
             <a:ext cx="165735" cy="522197"/>
           </a:xfrm>
           <a:prstGeom prst="bentConnector3">
@@ -5572,7 +5569,7 @@
         </p:nvCxnSpPr>
         <p:spPr>
           <a:xfrm>
-            <a:off x="1860115" y="1929384"/>
+            <a:off x="1860115" y="2391969"/>
             <a:ext cx="164744" cy="286199"/>
           </a:xfrm>
           <a:prstGeom prst="bentConnector3">
@@ -5619,7 +5616,7 @@
         </p:nvSpPr>
         <p:spPr>
           <a:xfrm>
-            <a:off x="1623316" y="3327765"/>
+            <a:off x="1623316" y="3790350"/>
             <a:ext cx="80683" cy="85691"/>
           </a:xfrm>
           <a:prstGeom prst="ellipse">
@@ -5675,7 +5672,7 @@
         </p:nvSpPr>
         <p:spPr>
           <a:xfrm flipH="1">
-            <a:off x="2025850" y="1221481"/>
+            <a:off x="2025850" y="1684066"/>
             <a:ext cx="994554" cy="371411"/>
           </a:xfrm>
           <a:prstGeom prst="flowChartPunchedCard">
@@ -5735,7 +5732,7 @@
         </p:nvSpPr>
         <p:spPr>
           <a:xfrm>
-            <a:off x="3004775" y="1674290"/>
+            <a:off x="3004775" y="2136875"/>
             <a:ext cx="1257270" cy="307777"/>
           </a:xfrm>
           <a:prstGeom prst="rect">
@@ -5787,7 +5784,7 @@
         </p:nvCxnSpPr>
         <p:spPr>
           <a:xfrm flipV="1">
-            <a:off x="7722166" y="1928134"/>
+            <a:off x="7668376" y="1928134"/>
             <a:ext cx="145085" cy="1250"/>
           </a:xfrm>
           <a:prstGeom prst="straightConnector1">
@@ -5837,7 +5834,7 @@
         </p:nvCxnSpPr>
         <p:spPr>
           <a:xfrm>
-            <a:off x="6193120" y="1927530"/>
+            <a:off x="6139330" y="1927530"/>
             <a:ext cx="157395" cy="1854"/>
           </a:xfrm>
           <a:prstGeom prst="straightConnector1">
@@ -5883,7 +5880,7 @@
         </p:nvSpPr>
         <p:spPr>
           <a:xfrm>
-            <a:off x="7867251" y="1782019"/>
+            <a:off x="7813461" y="1782019"/>
             <a:ext cx="1534500" cy="292230"/>
           </a:xfrm>
           <a:prstGeom prst="rect">
@@ -5984,7 +5981,7 @@
         </p:nvSpPr>
         <p:spPr>
           <a:xfrm>
-            <a:off x="7866001" y="2837091"/>
+            <a:off x="7812211" y="2557388"/>
             <a:ext cx="1536944" cy="292230"/>
           </a:xfrm>
           <a:prstGeom prst="rect">
@@ -6085,7 +6082,7 @@
         </p:nvSpPr>
         <p:spPr>
           <a:xfrm>
-            <a:off x="9538187" y="1783953"/>
+            <a:off x="9484397" y="1783953"/>
             <a:ext cx="396543" cy="287121"/>
           </a:xfrm>
           <a:prstGeom prst="rect">
@@ -6150,7 +6147,7 @@
         </p:nvCxnSpPr>
         <p:spPr>
           <a:xfrm flipV="1">
-            <a:off x="9402945" y="2981506"/>
+            <a:off x="9349155" y="2701803"/>
             <a:ext cx="132509" cy="1700"/>
           </a:xfrm>
           <a:prstGeom prst="straightConnector1">
@@ -6196,7 +6193,7 @@
         </p:nvSpPr>
         <p:spPr>
           <a:xfrm>
-            <a:off x="9535454" y="2837945"/>
+            <a:off x="9481664" y="2558242"/>
             <a:ext cx="396543" cy="287121"/>
           </a:xfrm>
           <a:prstGeom prst="rect">
@@ -6259,7 +6256,7 @@
         </p:nvSpPr>
         <p:spPr>
           <a:xfrm>
-            <a:off x="5799053" y="1783080"/>
+            <a:off x="5745263" y="1783080"/>
             <a:ext cx="274320" cy="292608"/>
           </a:xfrm>
           <a:prstGeom prst="can">
@@ -6317,7 +6314,7 @@
         </p:nvSpPr>
         <p:spPr>
           <a:xfrm>
-            <a:off x="6350515" y="1803084"/>
+            <a:off x="6296725" y="1803084"/>
             <a:ext cx="405197" cy="252599"/>
           </a:xfrm>
           <a:prstGeom prst="rect">
@@ -6382,7 +6379,7 @@
         </p:nvCxnSpPr>
         <p:spPr>
           <a:xfrm>
-            <a:off x="6195852" y="2982024"/>
+            <a:off x="6142062" y="2702321"/>
             <a:ext cx="154663" cy="50"/>
           </a:xfrm>
           <a:prstGeom prst="straightConnector1">
@@ -6430,7 +6427,7 @@
         </p:nvSpPr>
         <p:spPr>
           <a:xfrm>
-            <a:off x="5804630" y="2834640"/>
+            <a:off x="5750840" y="2554937"/>
             <a:ext cx="274320" cy="292608"/>
           </a:xfrm>
           <a:prstGeom prst="can">
@@ -6488,7 +6485,7 @@
         </p:nvSpPr>
         <p:spPr>
           <a:xfrm>
-            <a:off x="6350515" y="2856853"/>
+            <a:off x="6296725" y="2577150"/>
             <a:ext cx="405197" cy="250442"/>
           </a:xfrm>
           <a:prstGeom prst="rect">
@@ -6551,7 +6548,7 @@
         </p:nvSpPr>
         <p:spPr>
           <a:xfrm>
-            <a:off x="7447846" y="1783080"/>
+            <a:off x="7394056" y="1783080"/>
             <a:ext cx="274320" cy="292608"/>
           </a:xfrm>
           <a:prstGeom prst="can">
@@ -6611,7 +6608,7 @@
         </p:nvSpPr>
         <p:spPr>
           <a:xfrm>
-            <a:off x="7444296" y="2834640"/>
+            <a:off x="7390506" y="2554937"/>
             <a:ext cx="274320" cy="292608"/>
           </a:xfrm>
           <a:prstGeom prst="can">
@@ -6673,8 +6670,8 @@
         </p:nvCxnSpPr>
         <p:spPr>
           <a:xfrm>
-            <a:off x="6755712" y="1929384"/>
-            <a:ext cx="688584" cy="1051560"/>
+            <a:off x="6701922" y="1929384"/>
+            <a:ext cx="688584" cy="771857"/>
           </a:xfrm>
           <a:prstGeom prst="straightConnector1">
             <a:avLst/>
@@ -6723,7 +6720,7 @@
         </p:nvCxnSpPr>
         <p:spPr>
           <a:xfrm>
-            <a:off x="6755712" y="1929384"/>
+            <a:off x="6701922" y="1929384"/>
             <a:ext cx="692134" cy="0"/>
           </a:xfrm>
           <a:prstGeom prst="straightConnector1">
@@ -6773,7 +6770,7 @@
         </p:nvCxnSpPr>
         <p:spPr>
           <a:xfrm flipV="1">
-            <a:off x="6755712" y="2980944"/>
+            <a:off x="6701922" y="2701241"/>
             <a:ext cx="688584" cy="1130"/>
           </a:xfrm>
           <a:prstGeom prst="straightConnector1">
@@ -6823,8 +6820,8 @@
         </p:nvCxnSpPr>
         <p:spPr>
           <a:xfrm flipV="1">
-            <a:off x="6755712" y="1929384"/>
-            <a:ext cx="692134" cy="1052690"/>
+            <a:off x="6701922" y="1929384"/>
+            <a:ext cx="692134" cy="772987"/>
           </a:xfrm>
           <a:prstGeom prst="straightConnector1">
             <a:avLst/>
@@ -6873,7 +6870,7 @@
         </p:nvCxnSpPr>
         <p:spPr>
           <a:xfrm>
-            <a:off x="7718616" y="2980944"/>
+            <a:off x="7664826" y="2701241"/>
             <a:ext cx="147385" cy="2262"/>
           </a:xfrm>
           <a:prstGeom prst="straightConnector1">
@@ -6922,8 +6919,8 @@
         </p:nvCxnSpPr>
         <p:spPr>
           <a:xfrm flipV="1">
-            <a:off x="6710189" y="1929384"/>
-            <a:ext cx="737657" cy="1779887"/>
+            <a:off x="6699190" y="1929384"/>
+            <a:ext cx="694866" cy="1487279"/>
           </a:xfrm>
           <a:prstGeom prst="straightConnector1">
             <a:avLst/>
@@ -6971,8 +6968,8 @@
         </p:nvCxnSpPr>
         <p:spPr>
           <a:xfrm flipV="1">
-            <a:off x="6733235" y="2980944"/>
-            <a:ext cx="711061" cy="874883"/>
+            <a:off x="6695640" y="2701241"/>
+            <a:ext cx="694866" cy="757318"/>
           </a:xfrm>
           <a:prstGeom prst="straightConnector1">
             <a:avLst/>
@@ -7021,7 +7018,7 @@
         </p:nvCxnSpPr>
         <p:spPr>
           <a:xfrm flipV="1">
-            <a:off x="9401751" y="1927514"/>
+            <a:off x="9347961" y="1927514"/>
             <a:ext cx="136436" cy="620"/>
           </a:xfrm>
           <a:prstGeom prst="straightConnector1">
@@ -7067,8 +7064,8 @@
         </p:nvSpPr>
         <p:spPr>
           <a:xfrm>
-            <a:off x="5674648" y="894904"/>
-            <a:ext cx="4305731" cy="4835335"/>
+            <a:off x="5620858" y="894904"/>
+            <a:ext cx="4305731" cy="4223523"/>
           </a:xfrm>
           <a:prstGeom prst="roundRect">
             <a:avLst>
@@ -7122,7 +7119,7 @@
         </p:nvSpPr>
         <p:spPr>
           <a:xfrm>
-            <a:off x="1216329" y="887004"/>
+            <a:off x="1216329" y="1349589"/>
             <a:ext cx="4466787" cy="307777"/>
           </a:xfrm>
           <a:prstGeom prst="rect">
@@ -7162,7 +7159,7 @@
         </p:nvSpPr>
         <p:spPr>
           <a:xfrm>
-            <a:off x="7299946" y="902156"/>
+            <a:off x="7246156" y="902156"/>
             <a:ext cx="2632051" cy="523220"/>
           </a:xfrm>
           <a:prstGeom prst="rect">
@@ -7204,7 +7201,7 @@
         </p:nvSpPr>
         <p:spPr>
           <a:xfrm>
-            <a:off x="1591833" y="4069080"/>
+            <a:off x="1591833" y="4531665"/>
             <a:ext cx="274320" cy="292608"/>
           </a:xfrm>
           <a:prstGeom prst="can">
@@ -7262,7 +7259,7 @@
         </p:nvSpPr>
         <p:spPr>
           <a:xfrm flipH="1">
-            <a:off x="2023691" y="3686200"/>
+            <a:off x="2023691" y="4148785"/>
             <a:ext cx="996499" cy="386824"/>
           </a:xfrm>
           <a:prstGeom prst="flowChartPunchedCard">
@@ -7322,7 +7319,7 @@
         </p:nvSpPr>
         <p:spPr>
           <a:xfrm flipH="1">
-            <a:off x="2032273" y="4517560"/>
+            <a:off x="2032273" y="4980145"/>
             <a:ext cx="996498" cy="300300"/>
           </a:xfrm>
           <a:prstGeom prst="flowChartPunchedCard">
@@ -7397,7 +7394,7 @@
         </p:nvCxnSpPr>
         <p:spPr>
           <a:xfrm flipV="1">
-            <a:off x="1866153" y="3879612"/>
+            <a:off x="1866153" y="4342197"/>
             <a:ext cx="157538" cy="335772"/>
           </a:xfrm>
           <a:prstGeom prst="bentConnector3">
@@ -7448,7 +7445,7 @@
         </p:nvCxnSpPr>
         <p:spPr>
           <a:xfrm>
-            <a:off x="1866153" y="4215384"/>
+            <a:off x="1866153" y="4677969"/>
             <a:ext cx="166120" cy="452326"/>
           </a:xfrm>
           <a:prstGeom prst="bentConnector3">
@@ -7495,7 +7492,7 @@
         </p:nvSpPr>
         <p:spPr>
           <a:xfrm>
-            <a:off x="4397463" y="1341535"/>
+            <a:off x="4397463" y="1804120"/>
             <a:ext cx="827403" cy="3216635"/>
           </a:xfrm>
           <a:prstGeom prst="rect">
@@ -7551,7 +7548,7 @@
         </p:nvSpPr>
         <p:spPr>
           <a:xfrm>
-            <a:off x="4455640" y="2905227"/>
+            <a:off x="4455640" y="3367812"/>
             <a:ext cx="722611" cy="307777"/>
           </a:xfrm>
           <a:prstGeom prst="rect">
@@ -7627,7 +7624,7 @@
         </p:nvSpPr>
         <p:spPr>
           <a:xfrm>
-            <a:off x="4323168" y="1360882"/>
+            <a:off x="4323168" y="1823467"/>
             <a:ext cx="967003" cy="1384995"/>
           </a:xfrm>
           <a:prstGeom prst="rect">
@@ -7670,7 +7667,7 @@
         </p:nvSpPr>
         <p:spPr>
           <a:xfrm>
-            <a:off x="6634147" y="5146319"/>
+            <a:off x="6580357" y="4500849"/>
             <a:ext cx="867790" cy="261610"/>
           </a:xfrm>
           <a:prstGeom prst="rect">
@@ -7721,7 +7718,7 @@
         </p:nvSpPr>
         <p:spPr>
           <a:xfrm>
-            <a:off x="7863269" y="5146318"/>
+            <a:off x="7809479" y="4500848"/>
             <a:ext cx="1536944" cy="261610"/>
           </a:xfrm>
           <a:prstGeom prst="rect">
@@ -7774,7 +7771,7 @@
         </p:nvCxnSpPr>
         <p:spPr>
           <a:xfrm>
-            <a:off x="4478146" y="3441003"/>
+            <a:off x="4478146" y="3903588"/>
             <a:ext cx="650135" cy="0"/>
           </a:xfrm>
           <a:prstGeom prst="line">
@@ -7817,7 +7814,7 @@
         </p:nvCxnSpPr>
         <p:spPr>
           <a:xfrm>
-            <a:off x="4478146" y="3947110"/>
+            <a:off x="4478146" y="4409695"/>
             <a:ext cx="658749" cy="0"/>
           </a:xfrm>
           <a:prstGeom prst="line">
@@ -7858,7 +7855,7 @@
         </p:nvSpPr>
         <p:spPr>
           <a:xfrm>
-            <a:off x="4478146" y="4118285"/>
+            <a:off x="4478146" y="4580870"/>
             <a:ext cx="658749" cy="307777"/>
           </a:xfrm>
           <a:prstGeom prst="rect">
@@ -7939,7 +7936,7 @@
         </p:nvSpPr>
         <p:spPr>
           <a:xfrm>
-            <a:off x="4776937" y="3647692"/>
+            <a:off x="4776937" y="4110277"/>
             <a:ext cx="80683" cy="73581"/>
           </a:xfrm>
           <a:prstGeom prst="ellipse">
@@ -7995,7 +7992,7 @@
         </p:nvSpPr>
         <p:spPr>
           <a:xfrm>
-            <a:off x="4776937" y="3796456"/>
+            <a:off x="4776937" y="4259041"/>
             <a:ext cx="80683" cy="73581"/>
           </a:xfrm>
           <a:prstGeom prst="ellipse">
@@ -8051,7 +8048,7 @@
         </p:nvSpPr>
         <p:spPr>
           <a:xfrm>
-            <a:off x="4776937" y="3501136"/>
+            <a:off x="4776937" y="3963721"/>
             <a:ext cx="80683" cy="73581"/>
           </a:xfrm>
           <a:prstGeom prst="ellipse">
@@ -8111,7 +8108,7 @@
         </p:nvCxnSpPr>
         <p:spPr>
           <a:xfrm>
-            <a:off x="4213656" y="1810639"/>
+            <a:off x="4213656" y="2273224"/>
             <a:ext cx="241984" cy="1248477"/>
           </a:xfrm>
           <a:prstGeom prst="bentConnector3">
@@ -8158,7 +8155,7 @@
         </p:nvSpPr>
         <p:spPr>
           <a:xfrm>
-            <a:off x="4480175" y="2837840"/>
+            <a:off x="4480175" y="3300425"/>
             <a:ext cx="658749" cy="1597284"/>
           </a:xfrm>
           <a:prstGeom prst="rect">
@@ -8218,7 +8215,7 @@
         </p:nvCxnSpPr>
         <p:spPr>
           <a:xfrm flipV="1">
-            <a:off x="4211840" y="4272174"/>
+            <a:off x="4211840" y="4734759"/>
             <a:ext cx="266306" cy="305"/>
           </a:xfrm>
           <a:prstGeom prst="bentConnector3">
@@ -8265,7 +8262,7 @@
         </p:nvSpPr>
         <p:spPr>
           <a:xfrm>
-            <a:off x="5702178" y="5053987"/>
+            <a:off x="5648388" y="4408517"/>
             <a:ext cx="1013482" cy="430887"/>
           </a:xfrm>
           <a:prstGeom prst="rect">
@@ -8338,7 +8335,7 @@
         </p:nvSpPr>
         <p:spPr>
           <a:xfrm flipH="1">
-            <a:off x="5727626" y="2725063"/>
+            <a:off x="5673836" y="2445360"/>
             <a:ext cx="468226" cy="513921"/>
           </a:xfrm>
           <a:prstGeom prst="flowChartPunchedCard">
@@ -9071,7 +9068,7 @@
         </p:nvSpPr>
         <p:spPr>
           <a:xfrm>
-            <a:off x="3048741" y="2897636"/>
+            <a:off x="3048741" y="3360221"/>
             <a:ext cx="1247831" cy="307777"/>
           </a:xfrm>
           <a:prstGeom prst="rect">
@@ -9119,7 +9116,7 @@
         </p:nvSpPr>
         <p:spPr>
           <a:xfrm>
-            <a:off x="3046209" y="4114613"/>
+            <a:off x="3046209" y="4577198"/>
             <a:ext cx="1240512" cy="307777"/>
           </a:xfrm>
           <a:prstGeom prst="rect">
@@ -9172,7 +9169,7 @@
         </p:nvSpPr>
         <p:spPr>
           <a:xfrm>
-            <a:off x="5734747" y="899424"/>
+            <a:off x="5680957" y="899424"/>
             <a:ext cx="1498911" cy="738664"/>
           </a:xfrm>
           <a:prstGeom prst="rect">
@@ -9225,7 +9222,7 @@
         </p:nvSpPr>
         <p:spPr>
           <a:xfrm>
-            <a:off x="1546011" y="4980003"/>
+            <a:off x="1546011" y="5302734"/>
             <a:ext cx="3794836" cy="307777"/>
           </a:xfrm>
           <a:prstGeom prst="rect">
@@ -9273,7 +9270,7 @@
         </p:nvSpPr>
         <p:spPr>
           <a:xfrm>
-            <a:off x="5929247" y="3863242"/>
+            <a:off x="5875457" y="3389898"/>
             <a:ext cx="80683" cy="73581"/>
           </a:xfrm>
           <a:prstGeom prst="ellipse">
@@ -9329,7 +9326,7 @@
         </p:nvSpPr>
         <p:spPr>
           <a:xfrm>
-            <a:off x="5929247" y="4012006"/>
+            <a:off x="5875457" y="3538662"/>
             <a:ext cx="80683" cy="73581"/>
           </a:xfrm>
           <a:prstGeom prst="ellipse">
@@ -9385,7 +9382,7 @@
         </p:nvSpPr>
         <p:spPr>
           <a:xfrm>
-            <a:off x="5929247" y="3716686"/>
+            <a:off x="5875457" y="3243342"/>
             <a:ext cx="80683" cy="73581"/>
           </a:xfrm>
           <a:prstGeom prst="ellipse">
@@ -9441,7 +9438,7 @@
         </p:nvSpPr>
         <p:spPr>
           <a:xfrm>
-            <a:off x="6535239" y="3863242"/>
+            <a:off x="6481449" y="3389898"/>
             <a:ext cx="80683" cy="73581"/>
           </a:xfrm>
           <a:prstGeom prst="ellipse">
@@ -9497,7 +9494,7 @@
         </p:nvSpPr>
         <p:spPr>
           <a:xfrm>
-            <a:off x="6535239" y="4012006"/>
+            <a:off x="6481449" y="3538662"/>
             <a:ext cx="80683" cy="73581"/>
           </a:xfrm>
           <a:prstGeom prst="ellipse">
@@ -9553,7 +9550,7 @@
         </p:nvSpPr>
         <p:spPr>
           <a:xfrm>
-            <a:off x="6535239" y="3716686"/>
+            <a:off x="6481449" y="3243342"/>
             <a:ext cx="80683" cy="73581"/>
           </a:xfrm>
           <a:prstGeom prst="ellipse">
@@ -9609,7 +9606,7 @@
         </p:nvSpPr>
         <p:spPr>
           <a:xfrm>
-            <a:off x="7501116" y="3855827"/>
+            <a:off x="7447326" y="3382483"/>
             <a:ext cx="80683" cy="73581"/>
           </a:xfrm>
           <a:prstGeom prst="ellipse">
@@ -9665,7 +9662,7 @@
         </p:nvSpPr>
         <p:spPr>
           <a:xfrm>
-            <a:off x="7501116" y="4004591"/>
+            <a:off x="7447326" y="3531247"/>
             <a:ext cx="80683" cy="73581"/>
           </a:xfrm>
           <a:prstGeom prst="ellipse">
@@ -9721,7 +9718,7 @@
         </p:nvSpPr>
         <p:spPr>
           <a:xfrm>
-            <a:off x="7501116" y="3709271"/>
+            <a:off x="7447326" y="3235927"/>
             <a:ext cx="80683" cy="73581"/>
           </a:xfrm>
           <a:prstGeom prst="ellipse">
@@ -9777,7 +9774,7 @@
         </p:nvSpPr>
         <p:spPr>
           <a:xfrm>
-            <a:off x="8686689" y="3863242"/>
+            <a:off x="8632899" y="3389898"/>
             <a:ext cx="80683" cy="73581"/>
           </a:xfrm>
           <a:prstGeom prst="ellipse">
@@ -9833,7 +9830,7 @@
         </p:nvSpPr>
         <p:spPr>
           <a:xfrm>
-            <a:off x="8686689" y="4012006"/>
+            <a:off x="8632899" y="3538662"/>
             <a:ext cx="80683" cy="73581"/>
           </a:xfrm>
           <a:prstGeom prst="ellipse">
@@ -9889,7 +9886,7 @@
         </p:nvSpPr>
         <p:spPr>
           <a:xfrm>
-            <a:off x="8686689" y="3716686"/>
+            <a:off x="8632899" y="3243342"/>
             <a:ext cx="80683" cy="73581"/>
           </a:xfrm>
           <a:prstGeom prst="ellipse">
@@ -9945,7 +9942,7 @@
         </p:nvSpPr>
         <p:spPr>
           <a:xfrm>
-            <a:off x="7863269" y="4644603"/>
+            <a:off x="7809479" y="3999133"/>
             <a:ext cx="1536944" cy="292230"/>
           </a:xfrm>
           <a:prstGeom prst="rect">
@@ -10066,7 +10063,7 @@
         </p:nvCxnSpPr>
         <p:spPr>
           <a:xfrm>
-            <a:off x="9400213" y="4790718"/>
+            <a:off x="9346423" y="4145248"/>
             <a:ext cx="135242" cy="1475"/>
           </a:xfrm>
           <a:prstGeom prst="straightConnector1">
@@ -10112,7 +10109,7 @@
         </p:nvSpPr>
         <p:spPr>
           <a:xfrm>
-            <a:off x="9535455" y="4648632"/>
+            <a:off x="9481665" y="4003162"/>
             <a:ext cx="396543" cy="287121"/>
           </a:xfrm>
           <a:prstGeom prst="rect">
@@ -10177,7 +10174,7 @@
         </p:nvCxnSpPr>
         <p:spPr>
           <a:xfrm>
-            <a:off x="6193120" y="4786035"/>
+            <a:off x="6139330" y="4140565"/>
             <a:ext cx="154663" cy="1392"/>
           </a:xfrm>
           <a:prstGeom prst="straightConnector1">
@@ -10225,7 +10222,7 @@
         </p:nvSpPr>
         <p:spPr>
           <a:xfrm>
-            <a:off x="5801898" y="4645152"/>
+            <a:off x="5748108" y="3999682"/>
             <a:ext cx="274320" cy="292608"/>
           </a:xfrm>
           <a:prstGeom prst="can">
@@ -10283,7 +10280,7 @@
         </p:nvSpPr>
         <p:spPr>
           <a:xfrm>
-            <a:off x="6347783" y="4662206"/>
+            <a:off x="6293993" y="4016736"/>
             <a:ext cx="405197" cy="250442"/>
           </a:xfrm>
           <a:prstGeom prst="rect">
@@ -10346,7 +10343,7 @@
         </p:nvSpPr>
         <p:spPr>
           <a:xfrm>
-            <a:off x="7441564" y="4645152"/>
+            <a:off x="7387774" y="3999682"/>
             <a:ext cx="274320" cy="292608"/>
           </a:xfrm>
           <a:prstGeom prst="can">
@@ -10408,7 +10405,7 @@
         </p:nvCxnSpPr>
         <p:spPr>
           <a:xfrm>
-            <a:off x="6752980" y="4787427"/>
+            <a:off x="6699190" y="4141957"/>
             <a:ext cx="688584" cy="4029"/>
           </a:xfrm>
           <a:prstGeom prst="straightConnector1">
@@ -10458,7 +10455,7 @@
         </p:nvCxnSpPr>
         <p:spPr>
           <a:xfrm flipV="1">
-            <a:off x="7715884" y="4790718"/>
+            <a:off x="7662094" y="4145248"/>
             <a:ext cx="147385" cy="738"/>
           </a:xfrm>
           <a:prstGeom prst="straightConnector1">
@@ -10504,7 +10501,7 @@
         </p:nvSpPr>
         <p:spPr>
           <a:xfrm flipH="1">
-            <a:off x="5724894" y="4529074"/>
+            <a:off x="5671104" y="3883604"/>
             <a:ext cx="468226" cy="513921"/>
           </a:xfrm>
           <a:prstGeom prst="flowChartPunchedCard">
@@ -10565,8 +10562,8 @@
         </p:nvCxnSpPr>
         <p:spPr>
           <a:xfrm>
-            <a:off x="6703907" y="3929408"/>
-            <a:ext cx="737657" cy="862048"/>
+            <a:off x="6692908" y="3487375"/>
+            <a:ext cx="694866" cy="658611"/>
           </a:xfrm>
           <a:prstGeom prst="straightConnector1">
             <a:avLst/>
@@ -10608,15 +10605,14 @@
           </p:cNvPr>
           <p:cNvCxnSpPr>
             <a:cxnSpLocks/>
-            <a:stCxn id="241" idx="2"/>
-            <a:endCxn id="130" idx="0"/>
+            <a:endCxn id="130" idx="1"/>
           </p:cNvCxnSpPr>
           <p:nvPr/>
         </p:nvCxnSpPr>
         <p:spPr>
-          <a:xfrm rot="5400000">
-            <a:off x="7700497" y="5855892"/>
-            <a:ext cx="252671" cy="1364"/>
+          <a:xfrm>
+            <a:off x="5956140" y="5118427"/>
+            <a:ext cx="478099" cy="194077"/>
           </a:xfrm>
           <a:prstGeom prst="bentConnector3">
             <a:avLst>
@@ -10662,7 +10658,7 @@
         </p:nvSpPr>
         <p:spPr>
           <a:xfrm>
-            <a:off x="1228827" y="415704"/>
+            <a:off x="1487014" y="921321"/>
             <a:ext cx="2705589" cy="307777"/>
           </a:xfrm>
           <a:prstGeom prst="rect">
@@ -10707,19 +10703,28 @@
         </p:nvSpPr>
         <p:spPr>
           <a:xfrm>
-            <a:off x="4056383" y="413992"/>
+            <a:off x="4282296" y="919609"/>
             <a:ext cx="1153847" cy="307777"/>
           </a:xfrm>
           <a:prstGeom prst="rect">
             <a:avLst/>
           </a:prstGeom>
-          <a:noFill/>
-          <a:ln w="19050">
-            <a:solidFill>
-              <a:schemeClr val="tx1"/>
-            </a:solidFill>
-          </a:ln>
-        </p:spPr>
+          <a:ln/>
+        </p:spPr>
+        <p:style>
+          <a:lnRef idx="2">
+            <a:schemeClr val="dk1"/>
+          </a:lnRef>
+          <a:fillRef idx="1">
+            <a:schemeClr val="lt1"/>
+          </a:fillRef>
+          <a:effectRef idx="0">
+            <a:schemeClr val="dk1"/>
+          </a:effectRef>
+          <a:fontRef idx="minor">
+            <a:schemeClr val="dk1"/>
+          </a:fontRef>
+        </p:style>
         <p:txBody>
           <a:bodyPr wrap="square">
             <a:spAutoFit/>
@@ -10756,7 +10761,7 @@
         </p:nvCxnSpPr>
         <p:spPr>
           <a:xfrm>
-            <a:off x="4210526" y="3054886"/>
+            <a:off x="4210526" y="3517471"/>
             <a:ext cx="245114" cy="4230"/>
           </a:xfrm>
           <a:prstGeom prst="straightConnector1">
@@ -10805,8 +10810,8 @@
         </p:nvCxnSpPr>
         <p:spPr>
           <a:xfrm>
-            <a:off x="4633307" y="721769"/>
-            <a:ext cx="0" cy="180387"/>
+            <a:off x="4859220" y="1227386"/>
+            <a:ext cx="0" cy="137355"/>
           </a:xfrm>
           <a:prstGeom prst="straightConnector1">
             <a:avLst/>
@@ -10854,8 +10859,8 @@
         </p:nvCxnSpPr>
         <p:spPr>
           <a:xfrm>
-            <a:off x="2581622" y="723481"/>
-            <a:ext cx="0" cy="178675"/>
+            <a:off x="2839809" y="1229098"/>
+            <a:ext cx="0" cy="135643"/>
           </a:xfrm>
           <a:prstGeom prst="straightConnector1">
             <a:avLst/>
@@ -10900,7 +10905,7 @@
         </p:nvSpPr>
         <p:spPr>
           <a:xfrm>
-            <a:off x="1278881" y="2725068"/>
+            <a:off x="1289639" y="2725068"/>
             <a:ext cx="249419" cy="468085"/>
           </a:xfrm>
           <a:prstGeom prst="rightArrow">
@@ -10959,7 +10964,7 @@
         <p:spPr>
           <a:xfrm>
             <a:off x="5371734" y="2733191"/>
-            <a:ext cx="288796" cy="468085"/>
+            <a:ext cx="233531" cy="468085"/>
           </a:xfrm>
           <a:prstGeom prst="rightArrow">
             <a:avLst/>
@@ -11013,7 +11018,7 @@
         </p:nvSpPr>
         <p:spPr>
           <a:xfrm>
-            <a:off x="5674648" y="5396285"/>
+            <a:off x="5620858" y="4750815"/>
             <a:ext cx="4305731" cy="307777"/>
           </a:xfrm>
           <a:prstGeom prst="rect">
@@ -11061,7 +11066,7 @@
         </p:nvSpPr>
         <p:spPr>
           <a:xfrm>
-            <a:off x="1945655" y="1282092"/>
+            <a:off x="1945655" y="1744677"/>
             <a:ext cx="1157085" cy="307777"/>
           </a:xfrm>
           <a:prstGeom prst="rect">
@@ -11172,7 +11177,7 @@
         </p:nvSpPr>
         <p:spPr>
           <a:xfrm>
-            <a:off x="1962321" y="2534161"/>
+            <a:off x="1962321" y="2996746"/>
             <a:ext cx="1121297" cy="307777"/>
           </a:xfrm>
           <a:prstGeom prst="rect">
@@ -11283,7 +11288,7 @@
         </p:nvSpPr>
         <p:spPr>
           <a:xfrm>
-            <a:off x="1925049" y="3774229"/>
+            <a:off x="1925049" y="4236814"/>
             <a:ext cx="1121297" cy="307777"/>
           </a:xfrm>
           <a:prstGeom prst="rect">
@@ -11402,7 +11407,7 @@
         </p:nvSpPr>
         <p:spPr>
           <a:xfrm>
-            <a:off x="3140744" y="2778103"/>
+            <a:off x="3140744" y="3240688"/>
             <a:ext cx="1069782" cy="553566"/>
           </a:xfrm>
           <a:prstGeom prst="snip2DiagRect">
@@ -11448,7 +11453,7 @@
         </p:nvSpPr>
         <p:spPr>
           <a:xfrm>
-            <a:off x="3142058" y="3995696"/>
+            <a:off x="3142058" y="4458281"/>
             <a:ext cx="1069782" cy="553566"/>
           </a:xfrm>
           <a:prstGeom prst="snip2DiagRect">
@@ -11494,7 +11499,7 @@
         </p:nvSpPr>
         <p:spPr>
           <a:xfrm>
-            <a:off x="3143874" y="1533856"/>
+            <a:off x="3143874" y="1996441"/>
             <a:ext cx="1069782" cy="553566"/>
           </a:xfrm>
           <a:prstGeom prst="snip2DiagRect">
@@ -11526,651 +11531,630 @@
           </a:p>
         </p:txBody>
       </p:sp>
-      <p:grpSp>
-        <p:nvGrpSpPr>
-          <p:cNvPr id="2" name="Group 1">
-            <a:extLst>
-              <a:ext uri="{FF2B5EF4-FFF2-40B4-BE49-F238E27FC236}">
-                <a16:creationId xmlns:a16="http://schemas.microsoft.com/office/drawing/2014/main" id="{0CDD1DC4-C661-9ACC-89D2-F5009C557F9E}"/>
-              </a:ext>
-            </a:extLst>
-          </p:cNvPr>
-          <p:cNvGrpSpPr/>
-          <p:nvPr/>
-        </p:nvGrpSpPr>
-        <p:grpSpPr>
-          <a:xfrm>
-            <a:off x="894320" y="1797039"/>
-            <a:ext cx="6891053" cy="3168286"/>
-            <a:chOff x="890525" y="1797654"/>
-            <a:chExt cx="6891053" cy="3168286"/>
-          </a:xfrm>
-        </p:grpSpPr>
-        <p:sp>
-          <p:nvSpPr>
-            <p:cNvPr id="474" name="TextBox 473">
-              <a:extLst>
-                <a:ext uri="{FF2B5EF4-FFF2-40B4-BE49-F238E27FC236}">
-                  <a16:creationId xmlns:a16="http://schemas.microsoft.com/office/drawing/2014/main" id="{73CDEB3E-7B6F-300D-7552-B257577AB74B}"/>
-                </a:ext>
-              </a:extLst>
-            </p:cNvPr>
-            <p:cNvSpPr txBox="1"/>
-            <p:nvPr/>
-          </p:nvSpPr>
-          <p:spPr>
-            <a:xfrm>
-              <a:off x="899365" y="2855471"/>
-              <a:ext cx="377686" cy="307777"/>
-            </a:xfrm>
-            <a:prstGeom prst="rect">
-              <a:avLst/>
-            </a:prstGeom>
-            <a:noFill/>
-          </p:spPr>
-          <p:txBody>
-            <a:bodyPr wrap="square">
-              <a:spAutoFit/>
-            </a:bodyPr>
-            <a:lstStyle/>
-            <a:p>
-              <a:r>
-                <a:rPr lang="en-US" sz="1400" dirty="0">
-                  <a:latin typeface=""/>
-                  <a:ea typeface="Tahoma" panose="020B0604030504040204" pitchFamily="34" charset="0"/>
-                  <a:cs typeface="Tahoma" panose="020B0604030504040204" pitchFamily="34" charset="0"/>
-                </a:rPr>
-                <a:t>S</a:t>
-              </a:r>
-              <a:r>
-                <a:rPr lang="en-US" sz="1400" baseline="-25000" dirty="0">
-                  <a:latin typeface=""/>
-                  <a:ea typeface="Tahoma" panose="020B0604030504040204" pitchFamily="34" charset="0"/>
-                  <a:cs typeface="Tahoma" panose="020B0604030504040204" pitchFamily="34" charset="0"/>
-                </a:rPr>
-                <a:t>2</a:t>
-              </a:r>
-              <a:endParaRPr lang="en-US" sz="1400" dirty="0"/>
-            </a:p>
-          </p:txBody>
-        </p:sp>
-        <p:sp>
-          <p:nvSpPr>
-            <p:cNvPr id="476" name="TextBox 475">
-              <a:extLst>
-                <a:ext uri="{FF2B5EF4-FFF2-40B4-BE49-F238E27FC236}">
-                  <a16:creationId xmlns:a16="http://schemas.microsoft.com/office/drawing/2014/main" id="{B0FBF410-0198-FB69-8D03-187DA86C3A8A}"/>
-                </a:ext>
-              </a:extLst>
-            </p:cNvPr>
-            <p:cNvSpPr txBox="1"/>
-            <p:nvPr/>
-          </p:nvSpPr>
-          <p:spPr>
-            <a:xfrm>
-              <a:off x="893195" y="1801592"/>
-              <a:ext cx="388505" cy="307777"/>
-            </a:xfrm>
-            <a:prstGeom prst="rect">
-              <a:avLst/>
-            </a:prstGeom>
-            <a:noFill/>
-          </p:spPr>
-          <p:txBody>
-            <a:bodyPr wrap="square">
-              <a:spAutoFit/>
-            </a:bodyPr>
-            <a:lstStyle/>
-            <a:p>
-              <a:r>
-                <a:rPr lang="en-US" sz="1400" dirty="0">
-                  <a:latin typeface=""/>
-                  <a:ea typeface="Tahoma" panose="020B0604030504040204" pitchFamily="34" charset="0"/>
-                  <a:cs typeface="Tahoma" panose="020B0604030504040204" pitchFamily="34" charset="0"/>
-                </a:rPr>
-                <a:t>S</a:t>
-              </a:r>
-              <a:r>
-                <a:rPr lang="en-US" sz="1400" baseline="-25000" dirty="0">
-                  <a:latin typeface=""/>
-                  <a:ea typeface="Tahoma" panose="020B0604030504040204" pitchFamily="34" charset="0"/>
-                  <a:cs typeface="Tahoma" panose="020B0604030504040204" pitchFamily="34" charset="0"/>
-                </a:rPr>
-                <a:t>1</a:t>
-              </a:r>
-              <a:endParaRPr lang="en-US" sz="1600" dirty="0"/>
-            </a:p>
-          </p:txBody>
-        </p:sp>
-        <p:sp>
-          <p:nvSpPr>
-            <p:cNvPr id="478" name="TextBox 477">
-              <a:extLst>
-                <a:ext uri="{FF2B5EF4-FFF2-40B4-BE49-F238E27FC236}">
-                  <a16:creationId xmlns:a16="http://schemas.microsoft.com/office/drawing/2014/main" id="{424AEC7A-77D2-A8A9-86DB-97EEC66F5EE8}"/>
-                </a:ext>
-              </a:extLst>
-            </p:cNvPr>
-            <p:cNvSpPr txBox="1"/>
-            <p:nvPr/>
-          </p:nvSpPr>
-          <p:spPr>
-            <a:xfrm>
-              <a:off x="910935" y="4079914"/>
-              <a:ext cx="329252" cy="307777"/>
-            </a:xfrm>
-            <a:prstGeom prst="rect">
-              <a:avLst/>
-            </a:prstGeom>
-            <a:noFill/>
-          </p:spPr>
-          <p:txBody>
-            <a:bodyPr wrap="square">
-              <a:spAutoFit/>
-            </a:bodyPr>
-            <a:lstStyle/>
-            <a:p>
-              <a:r>
-                <a:rPr lang="en-US" sz="1400" dirty="0">
-                  <a:latin typeface=""/>
-                  <a:ea typeface="Tahoma" panose="020B0604030504040204" pitchFamily="34" charset="0"/>
-                  <a:cs typeface="Tahoma" panose="020B0604030504040204" pitchFamily="34" charset="0"/>
-                </a:rPr>
-                <a:t>S</a:t>
-              </a:r>
-              <a:r>
-                <a:rPr lang="en-US" sz="1400" baseline="-25000" dirty="0">
-                  <a:latin typeface=""/>
-                  <a:ea typeface="Tahoma" panose="020B0604030504040204" pitchFamily="34" charset="0"/>
-                  <a:cs typeface="Tahoma" panose="020B0604030504040204" pitchFamily="34" charset="0"/>
-                </a:rPr>
-                <a:t>i</a:t>
-              </a:r>
-              <a:endParaRPr lang="en-US" sz="1400" dirty="0"/>
-            </a:p>
-          </p:txBody>
-        </p:sp>
-        <p:sp>
-          <p:nvSpPr>
-            <p:cNvPr id="479" name="TextBox 478">
-              <a:extLst>
-                <a:ext uri="{FF2B5EF4-FFF2-40B4-BE49-F238E27FC236}">
-                  <a16:creationId xmlns:a16="http://schemas.microsoft.com/office/drawing/2014/main" id="{E4F2C94D-F6A8-EE10-7D0F-E788EA7DA40C}"/>
-                </a:ext>
-              </a:extLst>
-            </p:cNvPr>
-            <p:cNvSpPr txBox="1"/>
-            <p:nvPr/>
-          </p:nvSpPr>
-          <p:spPr>
-            <a:xfrm>
-              <a:off x="890525" y="4658163"/>
-              <a:ext cx="377686" cy="307777"/>
-            </a:xfrm>
-            <a:prstGeom prst="rect">
-              <a:avLst/>
-            </a:prstGeom>
-            <a:noFill/>
-          </p:spPr>
-          <p:txBody>
-            <a:bodyPr wrap="square">
-              <a:spAutoFit/>
-            </a:bodyPr>
-            <a:lstStyle/>
-            <a:p>
-              <a:r>
-                <a:rPr lang="en-US" sz="1400" dirty="0">
-                  <a:latin typeface=""/>
-                  <a:ea typeface="Tahoma" panose="020B0604030504040204" pitchFamily="34" charset="0"/>
-                  <a:cs typeface="Tahoma" panose="020B0604030504040204" pitchFamily="34" charset="0"/>
-                </a:rPr>
-                <a:t>S</a:t>
-              </a:r>
-              <a:r>
-                <a:rPr lang="en-US" sz="1400" baseline="-25000" dirty="0">
-                  <a:latin typeface=""/>
-                  <a:ea typeface="Tahoma" panose="020B0604030504040204" pitchFamily="34" charset="0"/>
-                  <a:cs typeface="Tahoma" panose="020B0604030504040204" pitchFamily="34" charset="0"/>
-                </a:rPr>
-                <a:t>n</a:t>
-              </a:r>
-              <a:endParaRPr lang="en-US" sz="1400" dirty="0"/>
-            </a:p>
-          </p:txBody>
-        </p:sp>
-        <p:sp>
-          <p:nvSpPr>
-            <p:cNvPr id="482" name="TextBox 481">
-              <a:extLst>
-                <a:ext uri="{FF2B5EF4-FFF2-40B4-BE49-F238E27FC236}">
-                  <a16:creationId xmlns:a16="http://schemas.microsoft.com/office/drawing/2014/main" id="{D0346870-A14F-C94A-1306-4A6066676879}"/>
-                </a:ext>
-              </a:extLst>
-            </p:cNvPr>
-            <p:cNvSpPr txBox="1"/>
-            <p:nvPr/>
-          </p:nvSpPr>
-          <p:spPr>
-            <a:xfrm>
-              <a:off x="1541754" y="2847835"/>
-              <a:ext cx="371704" cy="307777"/>
-            </a:xfrm>
-            <a:prstGeom prst="rect">
-              <a:avLst/>
-            </a:prstGeom>
-            <a:noFill/>
-          </p:spPr>
-          <p:txBody>
-            <a:bodyPr wrap="square">
-              <a:spAutoFit/>
-            </a:bodyPr>
-            <a:lstStyle/>
-            <a:p>
-              <a:r>
-                <a:rPr lang="en-US" sz="1400" dirty="0">
-                  <a:latin typeface=""/>
-                  <a:ea typeface="Tahoma" panose="020B0604030504040204" pitchFamily="34" charset="0"/>
-                  <a:cs typeface="Tahoma" panose="020B0604030504040204" pitchFamily="34" charset="0"/>
-                </a:rPr>
-                <a:t>S</a:t>
-              </a:r>
-              <a:r>
-                <a:rPr lang="en-US" sz="1400" baseline="-25000" dirty="0">
-                  <a:latin typeface=""/>
-                  <a:ea typeface="Tahoma" panose="020B0604030504040204" pitchFamily="34" charset="0"/>
-                  <a:cs typeface="Tahoma" panose="020B0604030504040204" pitchFamily="34" charset="0"/>
-                </a:rPr>
-                <a:t>2</a:t>
-              </a:r>
-              <a:endParaRPr lang="en-US" sz="1400" dirty="0"/>
-            </a:p>
-          </p:txBody>
-        </p:sp>
-        <p:sp>
-          <p:nvSpPr>
-            <p:cNvPr id="483" name="TextBox 482">
-              <a:extLst>
-                <a:ext uri="{FF2B5EF4-FFF2-40B4-BE49-F238E27FC236}">
-                  <a16:creationId xmlns:a16="http://schemas.microsoft.com/office/drawing/2014/main" id="{F594A9BB-516E-800C-74E7-2A23CFA5697A}"/>
-                </a:ext>
-              </a:extLst>
-            </p:cNvPr>
-            <p:cNvSpPr txBox="1"/>
-            <p:nvPr/>
-          </p:nvSpPr>
-          <p:spPr>
-            <a:xfrm>
-              <a:off x="1547571" y="1807832"/>
-              <a:ext cx="368726" cy="307777"/>
-            </a:xfrm>
-            <a:prstGeom prst="rect">
-              <a:avLst/>
-            </a:prstGeom>
-            <a:noFill/>
-          </p:spPr>
-          <p:txBody>
-            <a:bodyPr wrap="square">
-              <a:spAutoFit/>
-            </a:bodyPr>
-            <a:lstStyle/>
-            <a:p>
-              <a:r>
-                <a:rPr lang="en-US" sz="1400" dirty="0">
-                  <a:latin typeface=""/>
-                  <a:ea typeface="Tahoma" panose="020B0604030504040204" pitchFamily="34" charset="0"/>
-                  <a:cs typeface="Tahoma" panose="020B0604030504040204" pitchFamily="34" charset="0"/>
-                </a:rPr>
-                <a:t>S</a:t>
-              </a:r>
-              <a:r>
-                <a:rPr lang="en-US" sz="1400" baseline="-25000" dirty="0">
-                  <a:latin typeface=""/>
-                  <a:ea typeface="Tahoma" panose="020B0604030504040204" pitchFamily="34" charset="0"/>
-                  <a:cs typeface="Tahoma" panose="020B0604030504040204" pitchFamily="34" charset="0"/>
-                </a:rPr>
-                <a:t>1</a:t>
-              </a:r>
-              <a:endParaRPr lang="en-US" sz="1600" dirty="0"/>
-            </a:p>
-          </p:txBody>
-        </p:sp>
-        <p:sp>
-          <p:nvSpPr>
-            <p:cNvPr id="484" name="TextBox 483">
-              <a:extLst>
-                <a:ext uri="{FF2B5EF4-FFF2-40B4-BE49-F238E27FC236}">
-                  <a16:creationId xmlns:a16="http://schemas.microsoft.com/office/drawing/2014/main" id="{56AA260B-87C3-8CD3-B1CE-4392F971BF01}"/>
-                </a:ext>
-              </a:extLst>
-            </p:cNvPr>
-            <p:cNvSpPr txBox="1"/>
-            <p:nvPr/>
-          </p:nvSpPr>
-          <p:spPr>
-            <a:xfrm>
-              <a:off x="1553324" y="4090092"/>
-              <a:ext cx="354615" cy="307777"/>
-            </a:xfrm>
-            <a:prstGeom prst="rect">
-              <a:avLst/>
-            </a:prstGeom>
-            <a:noFill/>
-          </p:spPr>
-          <p:txBody>
-            <a:bodyPr wrap="square">
-              <a:spAutoFit/>
-            </a:bodyPr>
-            <a:lstStyle/>
-            <a:p>
-              <a:r>
-                <a:rPr lang="en-US" sz="1400" dirty="0">
-                  <a:latin typeface=""/>
-                  <a:ea typeface="Tahoma" panose="020B0604030504040204" pitchFamily="34" charset="0"/>
-                  <a:cs typeface="Tahoma" panose="020B0604030504040204" pitchFamily="34" charset="0"/>
-                </a:rPr>
-                <a:t>S</a:t>
-              </a:r>
-              <a:r>
-                <a:rPr lang="en-US" sz="1400" baseline="-25000" dirty="0">
-                  <a:latin typeface=""/>
-                  <a:ea typeface="Tahoma" panose="020B0604030504040204" pitchFamily="34" charset="0"/>
-                  <a:cs typeface="Tahoma" panose="020B0604030504040204" pitchFamily="34" charset="0"/>
-                </a:rPr>
-                <a:t>i</a:t>
-              </a:r>
-              <a:endParaRPr lang="en-US" sz="1400" dirty="0"/>
-            </a:p>
-          </p:txBody>
-        </p:sp>
-        <p:sp>
-          <p:nvSpPr>
-            <p:cNvPr id="485" name="TextBox 484">
-              <a:extLst>
-                <a:ext uri="{FF2B5EF4-FFF2-40B4-BE49-F238E27FC236}">
-                  <a16:creationId xmlns:a16="http://schemas.microsoft.com/office/drawing/2014/main" id="{5C5F5C7C-9B2A-C556-079F-3A53C1800BE9}"/>
-                </a:ext>
-              </a:extLst>
-            </p:cNvPr>
-            <p:cNvSpPr txBox="1"/>
-            <p:nvPr/>
-          </p:nvSpPr>
-          <p:spPr>
-            <a:xfrm>
-              <a:off x="5760511" y="2851780"/>
-              <a:ext cx="384027" cy="307777"/>
-            </a:xfrm>
-            <a:prstGeom prst="rect">
-              <a:avLst/>
-            </a:prstGeom>
-            <a:noFill/>
-          </p:spPr>
-          <p:txBody>
-            <a:bodyPr wrap="square">
-              <a:spAutoFit/>
-            </a:bodyPr>
-            <a:lstStyle/>
-            <a:p>
-              <a:r>
-                <a:rPr lang="en-US" sz="1400" dirty="0">
-                  <a:latin typeface=""/>
-                  <a:ea typeface="Tahoma" panose="020B0604030504040204" pitchFamily="34" charset="0"/>
-                  <a:cs typeface="Tahoma" panose="020B0604030504040204" pitchFamily="34" charset="0"/>
-                </a:rPr>
-                <a:t>S</a:t>
-              </a:r>
-              <a:r>
-                <a:rPr lang="en-US" sz="1400" baseline="-25000" dirty="0">
-                  <a:latin typeface=""/>
-                  <a:ea typeface="Tahoma" panose="020B0604030504040204" pitchFamily="34" charset="0"/>
-                  <a:cs typeface="Tahoma" panose="020B0604030504040204" pitchFamily="34" charset="0"/>
-                </a:rPr>
-                <a:t>2</a:t>
-              </a:r>
-              <a:endParaRPr lang="en-US" sz="1400" dirty="0"/>
-            </a:p>
-          </p:txBody>
-        </p:sp>
-        <p:sp>
-          <p:nvSpPr>
-            <p:cNvPr id="490" name="TextBox 489">
-              <a:extLst>
-                <a:ext uri="{FF2B5EF4-FFF2-40B4-BE49-F238E27FC236}">
-                  <a16:creationId xmlns:a16="http://schemas.microsoft.com/office/drawing/2014/main" id="{4B6DFA75-414A-870F-1755-D876C5B3E5B0}"/>
-                </a:ext>
-              </a:extLst>
-            </p:cNvPr>
-            <p:cNvSpPr txBox="1"/>
-            <p:nvPr/>
-          </p:nvSpPr>
-          <p:spPr>
-            <a:xfrm>
-              <a:off x="5754451" y="1799901"/>
-              <a:ext cx="403465" cy="307777"/>
-            </a:xfrm>
-            <a:prstGeom prst="rect">
-              <a:avLst/>
-            </a:prstGeom>
-            <a:noFill/>
-          </p:spPr>
-          <p:txBody>
-            <a:bodyPr wrap="square">
-              <a:spAutoFit/>
-            </a:bodyPr>
-            <a:lstStyle/>
-            <a:p>
-              <a:r>
-                <a:rPr lang="en-US" sz="1400" dirty="0">
-                  <a:latin typeface=""/>
-                  <a:ea typeface="Tahoma" panose="020B0604030504040204" pitchFamily="34" charset="0"/>
-                  <a:cs typeface="Tahoma" panose="020B0604030504040204" pitchFamily="34" charset="0"/>
-                </a:rPr>
-                <a:t>S</a:t>
-              </a:r>
-              <a:r>
-                <a:rPr lang="en-US" sz="1400" baseline="-25000" dirty="0">
-                  <a:latin typeface=""/>
-                  <a:ea typeface="Tahoma" panose="020B0604030504040204" pitchFamily="34" charset="0"/>
-                  <a:cs typeface="Tahoma" panose="020B0604030504040204" pitchFamily="34" charset="0"/>
-                </a:rPr>
-                <a:t>1</a:t>
-              </a:r>
-              <a:endParaRPr lang="en-US" sz="1600" dirty="0"/>
-            </a:p>
-          </p:txBody>
-        </p:sp>
-        <p:sp>
-          <p:nvSpPr>
-            <p:cNvPr id="494" name="TextBox 493">
-              <a:extLst>
-                <a:ext uri="{FF2B5EF4-FFF2-40B4-BE49-F238E27FC236}">
-                  <a16:creationId xmlns:a16="http://schemas.microsoft.com/office/drawing/2014/main" id="{08A486AA-B68C-7488-8AF1-C27CEFE20092}"/>
-                </a:ext>
-              </a:extLst>
-            </p:cNvPr>
-            <p:cNvSpPr txBox="1"/>
-            <p:nvPr/>
-          </p:nvSpPr>
-          <p:spPr>
-            <a:xfrm>
-              <a:off x="5757609" y="4654472"/>
-              <a:ext cx="384407" cy="307777"/>
-            </a:xfrm>
-            <a:prstGeom prst="rect">
-              <a:avLst/>
-            </a:prstGeom>
-            <a:noFill/>
-          </p:spPr>
-          <p:txBody>
-            <a:bodyPr wrap="square">
-              <a:spAutoFit/>
-            </a:bodyPr>
-            <a:lstStyle/>
-            <a:p>
-              <a:r>
-                <a:rPr lang="en-US" sz="1400" dirty="0">
-                  <a:latin typeface=""/>
-                  <a:ea typeface="Tahoma" panose="020B0604030504040204" pitchFamily="34" charset="0"/>
-                  <a:cs typeface="Tahoma" panose="020B0604030504040204" pitchFamily="34" charset="0"/>
-                </a:rPr>
-                <a:t>S</a:t>
-              </a:r>
-              <a:r>
-                <a:rPr lang="en-US" sz="1400" baseline="-25000" dirty="0">
-                  <a:latin typeface=""/>
-                  <a:ea typeface="Tahoma" panose="020B0604030504040204" pitchFamily="34" charset="0"/>
-                  <a:cs typeface="Tahoma" panose="020B0604030504040204" pitchFamily="34" charset="0"/>
-                </a:rPr>
-                <a:t>n</a:t>
-              </a:r>
-              <a:endParaRPr lang="en-US" sz="1400" dirty="0"/>
-            </a:p>
-          </p:txBody>
-        </p:sp>
-        <p:sp>
-          <p:nvSpPr>
-            <p:cNvPr id="495" name="TextBox 494">
-              <a:extLst>
-                <a:ext uri="{FF2B5EF4-FFF2-40B4-BE49-F238E27FC236}">
-                  <a16:creationId xmlns:a16="http://schemas.microsoft.com/office/drawing/2014/main" id="{CCEED0E5-1837-B470-4F90-A04B0279E032}"/>
-                </a:ext>
-              </a:extLst>
-            </p:cNvPr>
-            <p:cNvSpPr txBox="1"/>
-            <p:nvPr/>
-          </p:nvSpPr>
-          <p:spPr>
-            <a:xfrm>
-              <a:off x="7398863" y="2849533"/>
-              <a:ext cx="370500" cy="307777"/>
-            </a:xfrm>
-            <a:prstGeom prst="rect">
-              <a:avLst/>
-            </a:prstGeom>
-            <a:noFill/>
-          </p:spPr>
-          <p:txBody>
-            <a:bodyPr wrap="square">
-              <a:spAutoFit/>
-            </a:bodyPr>
-            <a:lstStyle/>
-            <a:p>
-              <a:r>
-                <a:rPr lang="en-US" sz="1400" dirty="0">
-                  <a:latin typeface=""/>
-                  <a:ea typeface="Tahoma" panose="020B0604030504040204" pitchFamily="34" charset="0"/>
-                  <a:cs typeface="Tahoma" panose="020B0604030504040204" pitchFamily="34" charset="0"/>
-                </a:rPr>
-                <a:t>S</a:t>
-              </a:r>
-              <a:r>
-                <a:rPr lang="en-US" sz="1400" baseline="-25000" dirty="0">
-                  <a:latin typeface=""/>
-                  <a:ea typeface="Tahoma" panose="020B0604030504040204" pitchFamily="34" charset="0"/>
-                  <a:cs typeface="Tahoma" panose="020B0604030504040204" pitchFamily="34" charset="0"/>
-                </a:rPr>
-                <a:t>2</a:t>
-              </a:r>
-              <a:endParaRPr lang="en-US" sz="1400" dirty="0"/>
-            </a:p>
-          </p:txBody>
-        </p:sp>
-        <p:sp>
-          <p:nvSpPr>
-            <p:cNvPr id="496" name="TextBox 495">
-              <a:extLst>
-                <a:ext uri="{FF2B5EF4-FFF2-40B4-BE49-F238E27FC236}">
-                  <a16:creationId xmlns:a16="http://schemas.microsoft.com/office/drawing/2014/main" id="{B2F50A5C-C9E6-C324-C04E-C12EA542C1D7}"/>
-                </a:ext>
-              </a:extLst>
-            </p:cNvPr>
-            <p:cNvSpPr txBox="1"/>
-            <p:nvPr/>
-          </p:nvSpPr>
-          <p:spPr>
-            <a:xfrm>
-              <a:off x="7404680" y="1797654"/>
-              <a:ext cx="376898" cy="307777"/>
-            </a:xfrm>
-            <a:prstGeom prst="rect">
-              <a:avLst/>
-            </a:prstGeom>
-            <a:noFill/>
-          </p:spPr>
-          <p:txBody>
-            <a:bodyPr wrap="square">
-              <a:spAutoFit/>
-            </a:bodyPr>
-            <a:lstStyle/>
-            <a:p>
-              <a:r>
-                <a:rPr lang="en-US" sz="1400" dirty="0">
-                  <a:latin typeface=""/>
-                  <a:ea typeface="Tahoma" panose="020B0604030504040204" pitchFamily="34" charset="0"/>
-                  <a:cs typeface="Tahoma" panose="020B0604030504040204" pitchFamily="34" charset="0"/>
-                </a:rPr>
-                <a:t>S</a:t>
-              </a:r>
-              <a:r>
-                <a:rPr lang="en-US" sz="1400" baseline="-25000" dirty="0">
-                  <a:latin typeface=""/>
-                  <a:ea typeface="Tahoma" panose="020B0604030504040204" pitchFamily="34" charset="0"/>
-                  <a:cs typeface="Tahoma" panose="020B0604030504040204" pitchFamily="34" charset="0"/>
-                </a:rPr>
-                <a:t>1</a:t>
-              </a:r>
-              <a:endParaRPr lang="en-US" sz="1600" dirty="0"/>
-            </a:p>
-          </p:txBody>
-        </p:sp>
-        <p:sp>
-          <p:nvSpPr>
-            <p:cNvPr id="497" name="TextBox 496">
-              <a:extLst>
-                <a:ext uri="{FF2B5EF4-FFF2-40B4-BE49-F238E27FC236}">
-                  <a16:creationId xmlns:a16="http://schemas.microsoft.com/office/drawing/2014/main" id="{E33A4806-877D-740D-4844-0B123FF30605}"/>
-                </a:ext>
-              </a:extLst>
-            </p:cNvPr>
-            <p:cNvSpPr txBox="1"/>
-            <p:nvPr/>
-          </p:nvSpPr>
-          <p:spPr>
-            <a:xfrm>
-              <a:off x="7390023" y="4658163"/>
-              <a:ext cx="378356" cy="307777"/>
-            </a:xfrm>
-            <a:prstGeom prst="rect">
-              <a:avLst/>
-            </a:prstGeom>
-            <a:noFill/>
-          </p:spPr>
-          <p:txBody>
-            <a:bodyPr wrap="square">
-              <a:spAutoFit/>
-            </a:bodyPr>
-            <a:lstStyle/>
-            <a:p>
-              <a:r>
-                <a:rPr lang="en-US" sz="1400" dirty="0">
-                  <a:latin typeface=""/>
-                  <a:ea typeface="Tahoma" panose="020B0604030504040204" pitchFamily="34" charset="0"/>
-                  <a:cs typeface="Tahoma" panose="020B0604030504040204" pitchFamily="34" charset="0"/>
-                </a:rPr>
-                <a:t>S</a:t>
-              </a:r>
-              <a:r>
-                <a:rPr lang="en-US" sz="1400" baseline="-25000" dirty="0">
-                  <a:latin typeface=""/>
-                  <a:ea typeface="Tahoma" panose="020B0604030504040204" pitchFamily="34" charset="0"/>
-                  <a:cs typeface="Tahoma" panose="020B0604030504040204" pitchFamily="34" charset="0"/>
-                </a:rPr>
-                <a:t>n</a:t>
-              </a:r>
-              <a:endParaRPr lang="en-US" sz="1400" dirty="0"/>
-            </a:p>
-          </p:txBody>
-        </p:sp>
-      </p:grpSp>
+      <p:sp>
+        <p:nvSpPr>
+          <p:cNvPr id="474" name="TextBox 473">
+            <a:extLst>
+              <a:ext uri="{FF2B5EF4-FFF2-40B4-BE49-F238E27FC236}">
+                <a16:creationId xmlns:a16="http://schemas.microsoft.com/office/drawing/2014/main" id="{73CDEB3E-7B6F-300D-7552-B257577AB74B}"/>
+              </a:ext>
+            </a:extLst>
+          </p:cNvPr>
+          <p:cNvSpPr txBox="1"/>
+          <p:nvPr/>
+        </p:nvSpPr>
+        <p:spPr>
+          <a:xfrm>
+            <a:off x="903160" y="2854856"/>
+            <a:ext cx="377686" cy="307777"/>
+          </a:xfrm>
+          <a:prstGeom prst="rect">
+            <a:avLst/>
+          </a:prstGeom>
+          <a:noFill/>
+        </p:spPr>
+        <p:txBody>
+          <a:bodyPr wrap="square">
+            <a:spAutoFit/>
+          </a:bodyPr>
+          <a:lstStyle/>
+          <a:p>
+            <a:r>
+              <a:rPr lang="en-US" sz="1400" dirty="0">
+                <a:latin typeface=""/>
+                <a:ea typeface="Tahoma" panose="020B0604030504040204" pitchFamily="34" charset="0"/>
+                <a:cs typeface="Tahoma" panose="020B0604030504040204" pitchFamily="34" charset="0"/>
+              </a:rPr>
+              <a:t>S</a:t>
+            </a:r>
+            <a:r>
+              <a:rPr lang="en-US" sz="1400" baseline="-25000" dirty="0">
+                <a:latin typeface=""/>
+                <a:ea typeface="Tahoma" panose="020B0604030504040204" pitchFamily="34" charset="0"/>
+                <a:cs typeface="Tahoma" panose="020B0604030504040204" pitchFamily="34" charset="0"/>
+              </a:rPr>
+              <a:t>2</a:t>
+            </a:r>
+            <a:endParaRPr lang="en-US" sz="1400" dirty="0"/>
+          </a:p>
+        </p:txBody>
+      </p:sp>
+      <p:sp>
+        <p:nvSpPr>
+          <p:cNvPr id="476" name="TextBox 475">
+            <a:extLst>
+              <a:ext uri="{FF2B5EF4-FFF2-40B4-BE49-F238E27FC236}">
+                <a16:creationId xmlns:a16="http://schemas.microsoft.com/office/drawing/2014/main" id="{B0FBF410-0198-FB69-8D03-187DA86C3A8A}"/>
+              </a:ext>
+            </a:extLst>
+          </p:cNvPr>
+          <p:cNvSpPr txBox="1"/>
+          <p:nvPr/>
+        </p:nvSpPr>
+        <p:spPr>
+          <a:xfrm>
+            <a:off x="896990" y="1800977"/>
+            <a:ext cx="388505" cy="307777"/>
+          </a:xfrm>
+          <a:prstGeom prst="rect">
+            <a:avLst/>
+          </a:prstGeom>
+          <a:noFill/>
+        </p:spPr>
+        <p:txBody>
+          <a:bodyPr wrap="square">
+            <a:spAutoFit/>
+          </a:bodyPr>
+          <a:lstStyle/>
+          <a:p>
+            <a:r>
+              <a:rPr lang="en-US" sz="1400" dirty="0">
+                <a:latin typeface=""/>
+                <a:ea typeface="Tahoma" panose="020B0604030504040204" pitchFamily="34" charset="0"/>
+                <a:cs typeface="Tahoma" panose="020B0604030504040204" pitchFamily="34" charset="0"/>
+              </a:rPr>
+              <a:t>S</a:t>
+            </a:r>
+            <a:r>
+              <a:rPr lang="en-US" sz="1400" baseline="-25000" dirty="0">
+                <a:latin typeface=""/>
+                <a:ea typeface="Tahoma" panose="020B0604030504040204" pitchFamily="34" charset="0"/>
+                <a:cs typeface="Tahoma" panose="020B0604030504040204" pitchFamily="34" charset="0"/>
+              </a:rPr>
+              <a:t>1</a:t>
+            </a:r>
+            <a:endParaRPr lang="en-US" sz="1600" dirty="0"/>
+          </a:p>
+        </p:txBody>
+      </p:sp>
+      <p:sp>
+        <p:nvSpPr>
+          <p:cNvPr id="478" name="TextBox 477">
+            <a:extLst>
+              <a:ext uri="{FF2B5EF4-FFF2-40B4-BE49-F238E27FC236}">
+                <a16:creationId xmlns:a16="http://schemas.microsoft.com/office/drawing/2014/main" id="{424AEC7A-77D2-A8A9-86DB-97EEC66F5EE8}"/>
+              </a:ext>
+            </a:extLst>
+          </p:cNvPr>
+          <p:cNvSpPr txBox="1"/>
+          <p:nvPr/>
+        </p:nvSpPr>
+        <p:spPr>
+          <a:xfrm>
+            <a:off x="914730" y="4079299"/>
+            <a:ext cx="329252" cy="307777"/>
+          </a:xfrm>
+          <a:prstGeom prst="rect">
+            <a:avLst/>
+          </a:prstGeom>
+          <a:noFill/>
+        </p:spPr>
+        <p:txBody>
+          <a:bodyPr wrap="square">
+            <a:spAutoFit/>
+          </a:bodyPr>
+          <a:lstStyle/>
+          <a:p>
+            <a:r>
+              <a:rPr lang="en-US" sz="1400" dirty="0">
+                <a:latin typeface=""/>
+                <a:ea typeface="Tahoma" panose="020B0604030504040204" pitchFamily="34" charset="0"/>
+                <a:cs typeface="Tahoma" panose="020B0604030504040204" pitchFamily="34" charset="0"/>
+              </a:rPr>
+              <a:t>S</a:t>
+            </a:r>
+            <a:r>
+              <a:rPr lang="en-US" sz="1400" baseline="-25000" dirty="0">
+                <a:latin typeface=""/>
+                <a:ea typeface="Tahoma" panose="020B0604030504040204" pitchFamily="34" charset="0"/>
+                <a:cs typeface="Tahoma" panose="020B0604030504040204" pitchFamily="34" charset="0"/>
+              </a:rPr>
+              <a:t>i</a:t>
+            </a:r>
+            <a:endParaRPr lang="en-US" sz="1400" dirty="0"/>
+          </a:p>
+        </p:txBody>
+      </p:sp>
+      <p:sp>
+        <p:nvSpPr>
+          <p:cNvPr id="479" name="TextBox 478">
+            <a:extLst>
+              <a:ext uri="{FF2B5EF4-FFF2-40B4-BE49-F238E27FC236}">
+                <a16:creationId xmlns:a16="http://schemas.microsoft.com/office/drawing/2014/main" id="{E4F2C94D-F6A8-EE10-7D0F-E788EA7DA40C}"/>
+              </a:ext>
+            </a:extLst>
+          </p:cNvPr>
+          <p:cNvSpPr txBox="1"/>
+          <p:nvPr/>
+        </p:nvSpPr>
+        <p:spPr>
+          <a:xfrm>
+            <a:off x="894320" y="4657548"/>
+            <a:ext cx="377686" cy="307777"/>
+          </a:xfrm>
+          <a:prstGeom prst="rect">
+            <a:avLst/>
+          </a:prstGeom>
+          <a:noFill/>
+        </p:spPr>
+        <p:txBody>
+          <a:bodyPr wrap="square">
+            <a:spAutoFit/>
+          </a:bodyPr>
+          <a:lstStyle/>
+          <a:p>
+            <a:r>
+              <a:rPr lang="en-US" sz="1400" dirty="0">
+                <a:latin typeface=""/>
+                <a:ea typeface="Tahoma" panose="020B0604030504040204" pitchFamily="34" charset="0"/>
+                <a:cs typeface="Tahoma" panose="020B0604030504040204" pitchFamily="34" charset="0"/>
+              </a:rPr>
+              <a:t>S</a:t>
+            </a:r>
+            <a:r>
+              <a:rPr lang="en-US" sz="1400" baseline="-25000" dirty="0">
+                <a:latin typeface=""/>
+                <a:ea typeface="Tahoma" panose="020B0604030504040204" pitchFamily="34" charset="0"/>
+                <a:cs typeface="Tahoma" panose="020B0604030504040204" pitchFamily="34" charset="0"/>
+              </a:rPr>
+              <a:t>n</a:t>
+            </a:r>
+            <a:endParaRPr lang="en-US" sz="1400" dirty="0"/>
+          </a:p>
+        </p:txBody>
+      </p:sp>
+      <p:sp>
+        <p:nvSpPr>
+          <p:cNvPr id="482" name="TextBox 481">
+            <a:extLst>
+              <a:ext uri="{FF2B5EF4-FFF2-40B4-BE49-F238E27FC236}">
+                <a16:creationId xmlns:a16="http://schemas.microsoft.com/office/drawing/2014/main" id="{D0346870-A14F-C94A-1306-4A6066676879}"/>
+              </a:ext>
+            </a:extLst>
+          </p:cNvPr>
+          <p:cNvSpPr txBox="1"/>
+          <p:nvPr/>
+        </p:nvSpPr>
+        <p:spPr>
+          <a:xfrm>
+            <a:off x="1545549" y="3309805"/>
+            <a:ext cx="371704" cy="307777"/>
+          </a:xfrm>
+          <a:prstGeom prst="rect">
+            <a:avLst/>
+          </a:prstGeom>
+          <a:noFill/>
+        </p:spPr>
+        <p:txBody>
+          <a:bodyPr wrap="square">
+            <a:spAutoFit/>
+          </a:bodyPr>
+          <a:lstStyle/>
+          <a:p>
+            <a:r>
+              <a:rPr lang="en-US" sz="1400" dirty="0">
+                <a:latin typeface=""/>
+                <a:ea typeface="Tahoma" panose="020B0604030504040204" pitchFamily="34" charset="0"/>
+                <a:cs typeface="Tahoma" panose="020B0604030504040204" pitchFamily="34" charset="0"/>
+              </a:rPr>
+              <a:t>S</a:t>
+            </a:r>
+            <a:r>
+              <a:rPr lang="en-US" sz="1400" baseline="-25000" dirty="0">
+                <a:latin typeface=""/>
+                <a:ea typeface="Tahoma" panose="020B0604030504040204" pitchFamily="34" charset="0"/>
+                <a:cs typeface="Tahoma" panose="020B0604030504040204" pitchFamily="34" charset="0"/>
+              </a:rPr>
+              <a:t>2</a:t>
+            </a:r>
+            <a:endParaRPr lang="en-US" sz="1400" dirty="0"/>
+          </a:p>
+        </p:txBody>
+      </p:sp>
+      <p:sp>
+        <p:nvSpPr>
+          <p:cNvPr id="483" name="TextBox 482">
+            <a:extLst>
+              <a:ext uri="{FF2B5EF4-FFF2-40B4-BE49-F238E27FC236}">
+                <a16:creationId xmlns:a16="http://schemas.microsoft.com/office/drawing/2014/main" id="{F594A9BB-516E-800C-74E7-2A23CFA5697A}"/>
+              </a:ext>
+            </a:extLst>
+          </p:cNvPr>
+          <p:cNvSpPr txBox="1"/>
+          <p:nvPr/>
+        </p:nvSpPr>
+        <p:spPr>
+          <a:xfrm>
+            <a:off x="1551366" y="2269802"/>
+            <a:ext cx="368726" cy="307777"/>
+          </a:xfrm>
+          <a:prstGeom prst="rect">
+            <a:avLst/>
+          </a:prstGeom>
+          <a:noFill/>
+        </p:spPr>
+        <p:txBody>
+          <a:bodyPr wrap="square">
+            <a:spAutoFit/>
+          </a:bodyPr>
+          <a:lstStyle/>
+          <a:p>
+            <a:r>
+              <a:rPr lang="en-US" sz="1400" dirty="0">
+                <a:latin typeface=""/>
+                <a:ea typeface="Tahoma" panose="020B0604030504040204" pitchFamily="34" charset="0"/>
+                <a:cs typeface="Tahoma" panose="020B0604030504040204" pitchFamily="34" charset="0"/>
+              </a:rPr>
+              <a:t>S</a:t>
+            </a:r>
+            <a:r>
+              <a:rPr lang="en-US" sz="1400" baseline="-25000" dirty="0">
+                <a:latin typeface=""/>
+                <a:ea typeface="Tahoma" panose="020B0604030504040204" pitchFamily="34" charset="0"/>
+                <a:cs typeface="Tahoma" panose="020B0604030504040204" pitchFamily="34" charset="0"/>
+              </a:rPr>
+              <a:t>1</a:t>
+            </a:r>
+            <a:endParaRPr lang="en-US" sz="1600" dirty="0"/>
+          </a:p>
+        </p:txBody>
+      </p:sp>
+      <p:sp>
+        <p:nvSpPr>
+          <p:cNvPr id="484" name="TextBox 483">
+            <a:extLst>
+              <a:ext uri="{FF2B5EF4-FFF2-40B4-BE49-F238E27FC236}">
+                <a16:creationId xmlns:a16="http://schemas.microsoft.com/office/drawing/2014/main" id="{56AA260B-87C3-8CD3-B1CE-4392F971BF01}"/>
+              </a:ext>
+            </a:extLst>
+          </p:cNvPr>
+          <p:cNvSpPr txBox="1"/>
+          <p:nvPr/>
+        </p:nvSpPr>
+        <p:spPr>
+          <a:xfrm>
+            <a:off x="1557119" y="4552062"/>
+            <a:ext cx="354615" cy="307777"/>
+          </a:xfrm>
+          <a:prstGeom prst="rect">
+            <a:avLst/>
+          </a:prstGeom>
+          <a:noFill/>
+        </p:spPr>
+        <p:txBody>
+          <a:bodyPr wrap="square">
+            <a:spAutoFit/>
+          </a:bodyPr>
+          <a:lstStyle/>
+          <a:p>
+            <a:r>
+              <a:rPr lang="en-US" sz="1400" dirty="0">
+                <a:latin typeface=""/>
+                <a:ea typeface="Tahoma" panose="020B0604030504040204" pitchFamily="34" charset="0"/>
+                <a:cs typeface="Tahoma" panose="020B0604030504040204" pitchFamily="34" charset="0"/>
+              </a:rPr>
+              <a:t>S</a:t>
+            </a:r>
+            <a:r>
+              <a:rPr lang="en-US" sz="1400" baseline="-25000" dirty="0">
+                <a:latin typeface=""/>
+                <a:ea typeface="Tahoma" panose="020B0604030504040204" pitchFamily="34" charset="0"/>
+                <a:cs typeface="Tahoma" panose="020B0604030504040204" pitchFamily="34" charset="0"/>
+              </a:rPr>
+              <a:t>i</a:t>
+            </a:r>
+            <a:endParaRPr lang="en-US" sz="1400" dirty="0"/>
+          </a:p>
+        </p:txBody>
+      </p:sp>
+      <p:sp>
+        <p:nvSpPr>
+          <p:cNvPr id="485" name="TextBox 484">
+            <a:extLst>
+              <a:ext uri="{FF2B5EF4-FFF2-40B4-BE49-F238E27FC236}">
+                <a16:creationId xmlns:a16="http://schemas.microsoft.com/office/drawing/2014/main" id="{5C5F5C7C-9B2A-C556-079F-3A53C1800BE9}"/>
+              </a:ext>
+            </a:extLst>
+          </p:cNvPr>
+          <p:cNvSpPr txBox="1"/>
+          <p:nvPr/>
+        </p:nvSpPr>
+        <p:spPr>
+          <a:xfrm>
+            <a:off x="5710516" y="2571462"/>
+            <a:ext cx="384027" cy="307777"/>
+          </a:xfrm>
+          <a:prstGeom prst="rect">
+            <a:avLst/>
+          </a:prstGeom>
+          <a:noFill/>
+        </p:spPr>
+        <p:txBody>
+          <a:bodyPr wrap="square">
+            <a:spAutoFit/>
+          </a:bodyPr>
+          <a:lstStyle/>
+          <a:p>
+            <a:r>
+              <a:rPr lang="en-US" sz="1400" dirty="0">
+                <a:latin typeface=""/>
+                <a:ea typeface="Tahoma" panose="020B0604030504040204" pitchFamily="34" charset="0"/>
+                <a:cs typeface="Tahoma" panose="020B0604030504040204" pitchFamily="34" charset="0"/>
+              </a:rPr>
+              <a:t>S</a:t>
+            </a:r>
+            <a:r>
+              <a:rPr lang="en-US" sz="1400" baseline="-25000" dirty="0">
+                <a:latin typeface=""/>
+                <a:ea typeface="Tahoma" panose="020B0604030504040204" pitchFamily="34" charset="0"/>
+                <a:cs typeface="Tahoma" panose="020B0604030504040204" pitchFamily="34" charset="0"/>
+              </a:rPr>
+              <a:t>2</a:t>
+            </a:r>
+            <a:endParaRPr lang="en-US" sz="1400" dirty="0"/>
+          </a:p>
+        </p:txBody>
+      </p:sp>
+      <p:sp>
+        <p:nvSpPr>
+          <p:cNvPr id="490" name="TextBox 489">
+            <a:extLst>
+              <a:ext uri="{FF2B5EF4-FFF2-40B4-BE49-F238E27FC236}">
+                <a16:creationId xmlns:a16="http://schemas.microsoft.com/office/drawing/2014/main" id="{4B6DFA75-414A-870F-1755-D876C5B3E5B0}"/>
+              </a:ext>
+            </a:extLst>
+          </p:cNvPr>
+          <p:cNvSpPr txBox="1"/>
+          <p:nvPr/>
+        </p:nvSpPr>
+        <p:spPr>
+          <a:xfrm>
+            <a:off x="5704456" y="1799286"/>
+            <a:ext cx="403465" cy="307777"/>
+          </a:xfrm>
+          <a:prstGeom prst="rect">
+            <a:avLst/>
+          </a:prstGeom>
+          <a:noFill/>
+        </p:spPr>
+        <p:txBody>
+          <a:bodyPr wrap="square">
+            <a:spAutoFit/>
+          </a:bodyPr>
+          <a:lstStyle/>
+          <a:p>
+            <a:r>
+              <a:rPr lang="en-US" sz="1400" dirty="0">
+                <a:latin typeface=""/>
+                <a:ea typeface="Tahoma" panose="020B0604030504040204" pitchFamily="34" charset="0"/>
+                <a:cs typeface="Tahoma" panose="020B0604030504040204" pitchFamily="34" charset="0"/>
+              </a:rPr>
+              <a:t>S</a:t>
+            </a:r>
+            <a:r>
+              <a:rPr lang="en-US" sz="1400" baseline="-25000" dirty="0">
+                <a:latin typeface=""/>
+                <a:ea typeface="Tahoma" panose="020B0604030504040204" pitchFamily="34" charset="0"/>
+                <a:cs typeface="Tahoma" panose="020B0604030504040204" pitchFamily="34" charset="0"/>
+              </a:rPr>
+              <a:t>1</a:t>
+            </a:r>
+            <a:endParaRPr lang="en-US" sz="1600" dirty="0"/>
+          </a:p>
+        </p:txBody>
+      </p:sp>
+      <p:sp>
+        <p:nvSpPr>
+          <p:cNvPr id="494" name="TextBox 493">
+            <a:extLst>
+              <a:ext uri="{FF2B5EF4-FFF2-40B4-BE49-F238E27FC236}">
+                <a16:creationId xmlns:a16="http://schemas.microsoft.com/office/drawing/2014/main" id="{08A486AA-B68C-7488-8AF1-C27CEFE20092}"/>
+              </a:ext>
+            </a:extLst>
+          </p:cNvPr>
+          <p:cNvSpPr txBox="1"/>
+          <p:nvPr/>
+        </p:nvSpPr>
+        <p:spPr>
+          <a:xfrm>
+            <a:off x="5707614" y="4008387"/>
+            <a:ext cx="384407" cy="307777"/>
+          </a:xfrm>
+          <a:prstGeom prst="rect">
+            <a:avLst/>
+          </a:prstGeom>
+          <a:noFill/>
+        </p:spPr>
+        <p:txBody>
+          <a:bodyPr wrap="square">
+            <a:spAutoFit/>
+          </a:bodyPr>
+          <a:lstStyle/>
+          <a:p>
+            <a:r>
+              <a:rPr lang="en-US" sz="1400" dirty="0">
+                <a:latin typeface=""/>
+                <a:ea typeface="Tahoma" panose="020B0604030504040204" pitchFamily="34" charset="0"/>
+                <a:cs typeface="Tahoma" panose="020B0604030504040204" pitchFamily="34" charset="0"/>
+              </a:rPr>
+              <a:t>S</a:t>
+            </a:r>
+            <a:r>
+              <a:rPr lang="en-US" sz="1400" baseline="-25000" dirty="0">
+                <a:latin typeface=""/>
+                <a:ea typeface="Tahoma" panose="020B0604030504040204" pitchFamily="34" charset="0"/>
+                <a:cs typeface="Tahoma" panose="020B0604030504040204" pitchFamily="34" charset="0"/>
+              </a:rPr>
+              <a:t>n</a:t>
+            </a:r>
+            <a:endParaRPr lang="en-US" sz="1400" dirty="0"/>
+          </a:p>
+        </p:txBody>
+      </p:sp>
+      <p:sp>
+        <p:nvSpPr>
+          <p:cNvPr id="495" name="TextBox 494">
+            <a:extLst>
+              <a:ext uri="{FF2B5EF4-FFF2-40B4-BE49-F238E27FC236}">
+                <a16:creationId xmlns:a16="http://schemas.microsoft.com/office/drawing/2014/main" id="{CCEED0E5-1837-B470-4F90-A04B0279E032}"/>
+              </a:ext>
+            </a:extLst>
+          </p:cNvPr>
+          <p:cNvSpPr txBox="1"/>
+          <p:nvPr/>
+        </p:nvSpPr>
+        <p:spPr>
+          <a:xfrm>
+            <a:off x="7348868" y="2569215"/>
+            <a:ext cx="370500" cy="307777"/>
+          </a:xfrm>
+          <a:prstGeom prst="rect">
+            <a:avLst/>
+          </a:prstGeom>
+          <a:noFill/>
+        </p:spPr>
+        <p:txBody>
+          <a:bodyPr wrap="square">
+            <a:spAutoFit/>
+          </a:bodyPr>
+          <a:lstStyle/>
+          <a:p>
+            <a:r>
+              <a:rPr lang="en-US" sz="1400" dirty="0">
+                <a:latin typeface=""/>
+                <a:ea typeface="Tahoma" panose="020B0604030504040204" pitchFamily="34" charset="0"/>
+                <a:cs typeface="Tahoma" panose="020B0604030504040204" pitchFamily="34" charset="0"/>
+              </a:rPr>
+              <a:t>S</a:t>
+            </a:r>
+            <a:r>
+              <a:rPr lang="en-US" sz="1400" baseline="-25000" dirty="0">
+                <a:latin typeface=""/>
+                <a:ea typeface="Tahoma" panose="020B0604030504040204" pitchFamily="34" charset="0"/>
+                <a:cs typeface="Tahoma" panose="020B0604030504040204" pitchFamily="34" charset="0"/>
+              </a:rPr>
+              <a:t>2</a:t>
+            </a:r>
+            <a:endParaRPr lang="en-US" sz="1400" dirty="0"/>
+          </a:p>
+        </p:txBody>
+      </p:sp>
+      <p:sp>
+        <p:nvSpPr>
+          <p:cNvPr id="496" name="TextBox 495">
+            <a:extLst>
+              <a:ext uri="{FF2B5EF4-FFF2-40B4-BE49-F238E27FC236}">
+                <a16:creationId xmlns:a16="http://schemas.microsoft.com/office/drawing/2014/main" id="{B2F50A5C-C9E6-C324-C04E-C12EA542C1D7}"/>
+              </a:ext>
+            </a:extLst>
+          </p:cNvPr>
+          <p:cNvSpPr txBox="1"/>
+          <p:nvPr/>
+        </p:nvSpPr>
+        <p:spPr>
+          <a:xfrm>
+            <a:off x="7354685" y="1797039"/>
+            <a:ext cx="376898" cy="307777"/>
+          </a:xfrm>
+          <a:prstGeom prst="rect">
+            <a:avLst/>
+          </a:prstGeom>
+          <a:noFill/>
+        </p:spPr>
+        <p:txBody>
+          <a:bodyPr wrap="square">
+            <a:spAutoFit/>
+          </a:bodyPr>
+          <a:lstStyle/>
+          <a:p>
+            <a:r>
+              <a:rPr lang="en-US" sz="1400" dirty="0">
+                <a:latin typeface=""/>
+                <a:ea typeface="Tahoma" panose="020B0604030504040204" pitchFamily="34" charset="0"/>
+                <a:cs typeface="Tahoma" panose="020B0604030504040204" pitchFamily="34" charset="0"/>
+              </a:rPr>
+              <a:t>S</a:t>
+            </a:r>
+            <a:r>
+              <a:rPr lang="en-US" sz="1400" baseline="-25000" dirty="0">
+                <a:latin typeface=""/>
+                <a:ea typeface="Tahoma" panose="020B0604030504040204" pitchFamily="34" charset="0"/>
+                <a:cs typeface="Tahoma" panose="020B0604030504040204" pitchFamily="34" charset="0"/>
+              </a:rPr>
+              <a:t>1</a:t>
+            </a:r>
+            <a:endParaRPr lang="en-US" sz="1600" dirty="0"/>
+          </a:p>
+        </p:txBody>
+      </p:sp>
+      <p:sp>
+        <p:nvSpPr>
+          <p:cNvPr id="497" name="TextBox 496">
+            <a:extLst>
+              <a:ext uri="{FF2B5EF4-FFF2-40B4-BE49-F238E27FC236}">
+                <a16:creationId xmlns:a16="http://schemas.microsoft.com/office/drawing/2014/main" id="{E33A4806-877D-740D-4844-0B123FF30605}"/>
+              </a:ext>
+            </a:extLst>
+          </p:cNvPr>
+          <p:cNvSpPr txBox="1"/>
+          <p:nvPr/>
+        </p:nvSpPr>
+        <p:spPr>
+          <a:xfrm>
+            <a:off x="7340028" y="4012078"/>
+            <a:ext cx="378356" cy="307777"/>
+          </a:xfrm>
+          <a:prstGeom prst="rect">
+            <a:avLst/>
+          </a:prstGeom>
+          <a:noFill/>
+        </p:spPr>
+        <p:txBody>
+          <a:bodyPr wrap="square">
+            <a:spAutoFit/>
+          </a:bodyPr>
+          <a:lstStyle/>
+          <a:p>
+            <a:r>
+              <a:rPr lang="en-US" sz="1400" dirty="0">
+                <a:latin typeface=""/>
+                <a:ea typeface="Tahoma" panose="020B0604030504040204" pitchFamily="34" charset="0"/>
+                <a:cs typeface="Tahoma" panose="020B0604030504040204" pitchFamily="34" charset="0"/>
+              </a:rPr>
+              <a:t>S</a:t>
+            </a:r>
+            <a:r>
+              <a:rPr lang="en-US" sz="1400" baseline="-25000" dirty="0">
+                <a:latin typeface=""/>
+                <a:ea typeface="Tahoma" panose="020B0604030504040204" pitchFamily="34" charset="0"/>
+                <a:cs typeface="Tahoma" panose="020B0604030504040204" pitchFamily="34" charset="0"/>
+              </a:rPr>
+              <a:t>n</a:t>
+            </a:r>
+            <a:endParaRPr lang="en-US" sz="1400" dirty="0"/>
+          </a:p>
+        </p:txBody>
+      </p:sp>
       <p:cxnSp>
         <p:nvCxnSpPr>
           <p:cNvPr id="93" name="Elbow Connector 92">
@@ -12189,7 +12173,7 @@
         </p:nvCxnSpPr>
         <p:spPr>
           <a:xfrm flipV="1">
-            <a:off x="3028771" y="4549262"/>
+            <a:off x="3028771" y="5011847"/>
             <a:ext cx="648178" cy="118448"/>
           </a:xfrm>
           <a:prstGeom prst="bentConnector2">
@@ -12238,7 +12222,7 @@
         </p:nvCxnSpPr>
         <p:spPr>
           <a:xfrm>
-            <a:off x="3020190" y="3879612"/>
+            <a:off x="3020190" y="4342197"/>
             <a:ext cx="656759" cy="116084"/>
           </a:xfrm>
           <a:prstGeom prst="bentConnector2">
@@ -12287,7 +12271,7 @@
         </p:nvCxnSpPr>
         <p:spPr>
           <a:xfrm>
-            <a:off x="3035890" y="2651342"/>
+            <a:off x="3035890" y="3113927"/>
             <a:ext cx="639745" cy="126761"/>
           </a:xfrm>
           <a:prstGeom prst="bentConnector2">
@@ -12336,7 +12320,7 @@
         </p:nvCxnSpPr>
         <p:spPr>
           <a:xfrm flipV="1">
-            <a:off x="3021319" y="3331669"/>
+            <a:off x="3021319" y="3794254"/>
             <a:ext cx="654316" cy="134100"/>
           </a:xfrm>
           <a:prstGeom prst="bentConnector2">
@@ -12385,7 +12369,7 @@
         </p:nvCxnSpPr>
         <p:spPr>
           <a:xfrm flipV="1">
-            <a:off x="3022094" y="2087422"/>
+            <a:off x="3022094" y="2550007"/>
             <a:ext cx="656671" cy="128161"/>
           </a:xfrm>
           <a:prstGeom prst="bentConnector2">
@@ -12434,7 +12418,7 @@
         </p:nvCxnSpPr>
         <p:spPr>
           <a:xfrm>
-            <a:off x="3020404" y="1407187"/>
+            <a:off x="3020404" y="1869772"/>
             <a:ext cx="658361" cy="126669"/>
           </a:xfrm>
           <a:prstGeom prst="bentConnector2">
